--- a/info/UnitnBookingBot.pptx
+++ b/info/UnitnBookingBot.pptx
@@ -6,6 +6,14 @@
   </p:sldMasterIdLst>
   <p:sldIdLst>
     <p:sldId id="256" r:id="rId2"/>
+    <p:sldId id="260" r:id="rId3"/>
+    <p:sldId id="261" r:id="rId4"/>
+    <p:sldId id="259" r:id="rId5"/>
+    <p:sldId id="262" r:id="rId6"/>
+    <p:sldId id="263" r:id="rId7"/>
+    <p:sldId id="264" r:id="rId8"/>
+    <p:sldId id="265" r:id="rId9"/>
+    <p:sldId id="257" r:id="rId10"/>
   </p:sldIdLst>
   <p:sldSz cx="9144000" cy="6858000" type="screen4x3"/>
   <p:notesSz cx="6858000" cy="9144000"/>
@@ -288,7 +296,7 @@
           <a:p>
             <a:fld id="{7F49D355-16BD-4E45-BD9A-5EA878CF7CBD}" type="datetimeFigureOut">
               <a:rPr lang="it-IT" smtClean="0"/>
-              <a:t>06/02/2026</a:t>
+              <a:t>26/02/2026</a:t>
             </a:fld>
             <a:endParaRPr lang="it-IT"/>
           </a:p>
@@ -453,7 +461,7 @@
           <a:p>
             <a:fld id="{7F49D355-16BD-4E45-BD9A-5EA878CF7CBD}" type="datetimeFigureOut">
               <a:rPr lang="it-IT" smtClean="0"/>
-              <a:t>06/02/2026</a:t>
+              <a:t>26/02/2026</a:t>
             </a:fld>
             <a:endParaRPr lang="it-IT"/>
           </a:p>
@@ -628,7 +636,7 @@
           <a:p>
             <a:fld id="{7F49D355-16BD-4E45-BD9A-5EA878CF7CBD}" type="datetimeFigureOut">
               <a:rPr lang="it-IT" smtClean="0"/>
-              <a:t>06/02/2026</a:t>
+              <a:t>26/02/2026</a:t>
             </a:fld>
             <a:endParaRPr lang="it-IT"/>
           </a:p>
@@ -793,7 +801,7 @@
           <a:p>
             <a:fld id="{7F49D355-16BD-4E45-BD9A-5EA878CF7CBD}" type="datetimeFigureOut">
               <a:rPr lang="it-IT" smtClean="0"/>
-              <a:t>06/02/2026</a:t>
+              <a:t>26/02/2026</a:t>
             </a:fld>
             <a:endParaRPr lang="it-IT"/>
           </a:p>
@@ -1034,7 +1042,7 @@
           <a:p>
             <a:fld id="{7F49D355-16BD-4E45-BD9A-5EA878CF7CBD}" type="datetimeFigureOut">
               <a:rPr lang="it-IT" smtClean="0"/>
-              <a:t>06/02/2026</a:t>
+              <a:t>26/02/2026</a:t>
             </a:fld>
             <a:endParaRPr lang="it-IT"/>
           </a:p>
@@ -1317,7 +1325,7 @@
           <a:p>
             <a:fld id="{7F49D355-16BD-4E45-BD9A-5EA878CF7CBD}" type="datetimeFigureOut">
               <a:rPr lang="it-IT" smtClean="0"/>
-              <a:t>06/02/2026</a:t>
+              <a:t>26/02/2026</a:t>
             </a:fld>
             <a:endParaRPr lang="it-IT"/>
           </a:p>
@@ -1734,7 +1742,7 @@
           <a:p>
             <a:fld id="{7F49D355-16BD-4E45-BD9A-5EA878CF7CBD}" type="datetimeFigureOut">
               <a:rPr lang="it-IT" smtClean="0"/>
-              <a:t>06/02/2026</a:t>
+              <a:t>26/02/2026</a:t>
             </a:fld>
             <a:endParaRPr lang="it-IT"/>
           </a:p>
@@ -1847,7 +1855,7 @@
           <a:p>
             <a:fld id="{7F49D355-16BD-4E45-BD9A-5EA878CF7CBD}" type="datetimeFigureOut">
               <a:rPr lang="it-IT" smtClean="0"/>
-              <a:t>06/02/2026</a:t>
+              <a:t>26/02/2026</a:t>
             </a:fld>
             <a:endParaRPr lang="it-IT"/>
           </a:p>
@@ -1937,7 +1945,7 @@
           <a:p>
             <a:fld id="{7F49D355-16BD-4E45-BD9A-5EA878CF7CBD}" type="datetimeFigureOut">
               <a:rPr lang="it-IT" smtClean="0"/>
-              <a:t>06/02/2026</a:t>
+              <a:t>26/02/2026</a:t>
             </a:fld>
             <a:endParaRPr lang="it-IT"/>
           </a:p>
@@ -2209,7 +2217,7 @@
           <a:p>
             <a:fld id="{7F49D355-16BD-4E45-BD9A-5EA878CF7CBD}" type="datetimeFigureOut">
               <a:rPr lang="it-IT" smtClean="0"/>
-              <a:t>06/02/2026</a:t>
+              <a:t>26/02/2026</a:t>
             </a:fld>
             <a:endParaRPr lang="it-IT"/>
           </a:p>
@@ -2457,7 +2465,7 @@
           <a:p>
             <a:fld id="{7F49D355-16BD-4E45-BD9A-5EA878CF7CBD}" type="datetimeFigureOut">
               <a:rPr lang="it-IT" smtClean="0"/>
-              <a:t>06/02/2026</a:t>
+              <a:t>26/02/2026</a:t>
             </a:fld>
             <a:endParaRPr lang="it-IT"/>
           </a:p>
@@ -2665,7 +2673,7 @@
           <a:p>
             <a:fld id="{7F49D355-16BD-4E45-BD9A-5EA878CF7CBD}" type="datetimeFigureOut">
               <a:rPr lang="it-IT" smtClean="0"/>
-              <a:t>06/02/2026</a:t>
+              <a:t>26/02/2026</a:t>
             </a:fld>
             <a:endParaRPr lang="it-IT"/>
           </a:p>
@@ -3035,6 +3043,48 @@
           <a:chExt cx="0" cy="0"/>
         </a:xfrm>
       </p:grpSpPr>
+      <p:pic>
+        <p:nvPicPr>
+          <p:cNvPr id="1026" name="Picture 2" descr="C:\Users\nives\AllFolders\UnitnBookingBot\pictures\unitn_logo.png"/>
+          <p:cNvPicPr>
+            <a:picLocks noChangeAspect="1" noChangeArrowheads="1"/>
+          </p:cNvPicPr>
+          <p:nvPr/>
+        </p:nvPicPr>
+        <p:blipFill>
+          <a:blip r:embed="rId2">
+            <a:lum bright="70000" contrast="-70000"/>
+            <a:extLst>
+              <a:ext uri="{28A0092B-C50C-407E-A947-70E740481C1C}">
+                <a14:useLocalDpi xmlns:a14="http://schemas.microsoft.com/office/drawing/2010/main" val="0"/>
+              </a:ext>
+            </a:extLst>
+          </a:blip>
+          <a:srcRect/>
+          <a:stretch>
+            <a:fillRect/>
+          </a:stretch>
+        </p:blipFill>
+        <p:spPr bwMode="auto">
+          <a:xfrm>
+            <a:off x="1187624" y="1419"/>
+            <a:ext cx="6858000" cy="6858000"/>
+          </a:xfrm>
+          <a:prstGeom prst="rect">
+            <a:avLst/>
+          </a:prstGeom>
+          <a:noFill/>
+          <a:extLst>
+            <a:ext uri="{909E8E84-426E-40DD-AFC4-6F175D3DCCD1}">
+              <a14:hiddenFill xmlns:a14="http://schemas.microsoft.com/office/drawing/2010/main">
+                <a:solidFill>
+                  <a:srgbClr val="FFFFFF"/>
+                </a:solidFill>
+              </a14:hiddenFill>
+            </a:ext>
+          </a:extLst>
+        </p:spPr>
+      </p:pic>
       <p:sp>
         <p:nvSpPr>
           <p:cNvPr id="2" name="Titolo 1"/>
@@ -3045,16 +3095,43 @@
             <p:ph type="ctrTitle"/>
           </p:nvPr>
         </p:nvSpPr>
-        <p:spPr/>
-        <p:txBody>
-          <a:bodyPr/>
-          <a:lstStyle/>
-          <a:p>
-            <a:r>
-              <a:rPr lang="en-US" smtClean="0"/>
-              <a:t>UniTN Booking Bot</a:t>
-            </a:r>
-            <a:endParaRPr lang="en-US"/>
+        <p:spPr>
+          <a:xfrm>
+            <a:off x="688032" y="2391023"/>
+            <a:ext cx="7772400" cy="1470025"/>
+          </a:xfrm>
+        </p:spPr>
+        <p:txBody>
+          <a:bodyPr/>
+          <a:lstStyle/>
+          <a:p>
+            <a:r>
+              <a:rPr lang="en-US" b="1" dirty="0" err="1" smtClean="0">
+                <a:solidFill>
+                  <a:srgbClr val="C00000"/>
+                </a:solidFill>
+                <a:latin typeface="Times New Roman" pitchFamily="18" charset="0"/>
+                <a:cs typeface="Times New Roman" pitchFamily="18" charset="0"/>
+              </a:rPr>
+              <a:t>UniTN</a:t>
+            </a:r>
+            <a:r>
+              <a:rPr lang="en-US" b="1" dirty="0" smtClean="0">
+                <a:solidFill>
+                  <a:srgbClr val="C00000"/>
+                </a:solidFill>
+                <a:latin typeface="Times New Roman" pitchFamily="18" charset="0"/>
+                <a:cs typeface="Times New Roman" pitchFamily="18" charset="0"/>
+              </a:rPr>
+              <a:t> Booking Bot</a:t>
+            </a:r>
+            <a:endParaRPr lang="en-US" b="1" dirty="0">
+              <a:solidFill>
+                <a:srgbClr val="C00000"/>
+              </a:solidFill>
+              <a:latin typeface="Times New Roman" pitchFamily="18" charset="0"/>
+              <a:cs typeface="Times New Roman" pitchFamily="18" charset="0"/>
+            </a:endParaRPr>
           </a:p>
         </p:txBody>
       </p:sp>
@@ -3068,12 +3145,65 @@
             <p:ph type="subTitle" idx="1"/>
           </p:nvPr>
         </p:nvSpPr>
-        <p:spPr/>
-        <p:txBody>
-          <a:bodyPr/>
-          <a:lstStyle/>
-          <a:p>
-            <a:endParaRPr lang="en-US"/>
+        <p:spPr>
+          <a:xfrm>
+            <a:off x="1043608" y="3789040"/>
+            <a:ext cx="7088832" cy="1752600"/>
+          </a:xfrm>
+        </p:spPr>
+        <p:txBody>
+          <a:bodyPr/>
+          <a:lstStyle/>
+          <a:p>
+            <a:r>
+              <a:rPr lang="en-US" i="1" dirty="0" smtClean="0">
+                <a:solidFill>
+                  <a:schemeClr val="tx2"/>
+                </a:solidFill>
+                <a:latin typeface="Times New Roman" pitchFamily="18" charset="0"/>
+                <a:cs typeface="Times New Roman" pitchFamily="18" charset="0"/>
+              </a:rPr>
+              <a:t>Laboratory </a:t>
+            </a:r>
+            <a:r>
+              <a:rPr lang="en-US" i="1" dirty="0">
+                <a:solidFill>
+                  <a:schemeClr val="tx2"/>
+                </a:solidFill>
+                <a:latin typeface="Times New Roman" pitchFamily="18" charset="0"/>
+                <a:cs typeface="Times New Roman" pitchFamily="18" charset="0"/>
+              </a:rPr>
+              <a:t>of Internet of </a:t>
+            </a:r>
+            <a:r>
+              <a:rPr lang="en-US" i="1" dirty="0" smtClean="0">
+                <a:solidFill>
+                  <a:schemeClr val="tx2"/>
+                </a:solidFill>
+                <a:latin typeface="Times New Roman" pitchFamily="18" charset="0"/>
+                <a:cs typeface="Times New Roman" pitchFamily="18" charset="0"/>
+              </a:rPr>
+              <a:t>Things</a:t>
+            </a:r>
+          </a:p>
+          <a:p>
+            <a:r>
+              <a:rPr lang="en-US" i="1" dirty="0">
+                <a:solidFill>
+                  <a:schemeClr val="tx2"/>
+                </a:solidFill>
+                <a:latin typeface="Times New Roman" pitchFamily="18" charset="0"/>
+                <a:cs typeface="Times New Roman" pitchFamily="18" charset="0"/>
+              </a:rPr>
+              <a:t>Course Project</a:t>
+            </a:r>
+            <a:endParaRPr lang="en-US" i="1" dirty="0">
+              <a:solidFill>
+                <a:schemeClr val="tx2"/>
+              </a:solidFill>
+              <a:latin typeface="Times New Roman" pitchFamily="18" charset="0"/>
+              <a:cs typeface="Times New Roman" pitchFamily="18" charset="0"/>
+            </a:endParaRPr>
           </a:p>
         </p:txBody>
       </p:sp>
@@ -3087,6 +3217,2579 @@
   <p:clrMapOvr>
     <a:masterClrMapping/>
   </p:clrMapOvr>
+  <p:timing>
+    <p:tnLst>
+      <p:par>
+        <p:cTn id="1" dur="indefinite" restart="never" nodeType="tmRoot"/>
+      </p:par>
+    </p:tnLst>
+  </p:timing>
+</p:sld>
+</file>
+
+<file path=ppt/slides/slide2.xml><?xml version="1.0" encoding="utf-8"?>
+<p:sld xmlns:a="http://schemas.openxmlformats.org/drawingml/2006/main" xmlns:r="http://schemas.openxmlformats.org/officeDocument/2006/relationships" xmlns:p="http://schemas.openxmlformats.org/presentationml/2006/main">
+  <p:cSld>
+    <p:spTree>
+      <p:nvGrpSpPr>
+        <p:cNvPr id="1" name=""/>
+        <p:cNvGrpSpPr/>
+        <p:nvPr/>
+      </p:nvGrpSpPr>
+      <p:grpSpPr>
+        <a:xfrm>
+          <a:off x="0" y="0"/>
+          <a:ext cx="0" cy="0"/>
+          <a:chOff x="0" y="0"/>
+          <a:chExt cx="0" cy="0"/>
+        </a:xfrm>
+      </p:grpSpPr>
+      <p:sp>
+        <p:nvSpPr>
+          <p:cNvPr id="2" name="Titolo 1"/>
+          <p:cNvSpPr>
+            <a:spLocks noGrp="1"/>
+          </p:cNvSpPr>
+          <p:nvPr>
+            <p:ph type="title"/>
+          </p:nvPr>
+        </p:nvSpPr>
+        <p:spPr>
+          <a:xfrm>
+            <a:off x="467544" y="274638"/>
+            <a:ext cx="8219256" cy="1143000"/>
+          </a:xfrm>
+        </p:spPr>
+        <p:txBody>
+          <a:bodyPr/>
+          <a:lstStyle/>
+          <a:p>
+            <a:r>
+              <a:rPr lang="en-US" b="1" dirty="0" smtClean="0">
+                <a:solidFill>
+                  <a:srgbClr val="C00000"/>
+                </a:solidFill>
+                <a:latin typeface="Times New Roman" pitchFamily="18" charset="0"/>
+                <a:cs typeface="Times New Roman" pitchFamily="18" charset="0"/>
+              </a:rPr>
+              <a:t>The Purpose</a:t>
+            </a:r>
+            <a:endParaRPr lang="en-US" b="1" dirty="0">
+              <a:solidFill>
+                <a:srgbClr val="C00000"/>
+              </a:solidFill>
+              <a:latin typeface="Times New Roman" pitchFamily="18" charset="0"/>
+              <a:cs typeface="Times New Roman" pitchFamily="18" charset="0"/>
+            </a:endParaRPr>
+          </a:p>
+        </p:txBody>
+      </p:sp>
+      <p:pic>
+        <p:nvPicPr>
+          <p:cNvPr id="4" name="Picture 2" descr="C:\Users\nives\AllFolders\UnitnBookingBot\pictures\unitn_logo.png"/>
+          <p:cNvPicPr>
+            <a:picLocks noChangeAspect="1" noChangeArrowheads="1"/>
+          </p:cNvPicPr>
+          <p:nvPr/>
+        </p:nvPicPr>
+        <p:blipFill>
+          <a:blip r:embed="rId2">
+            <a:lum bright="70000" contrast="-70000"/>
+            <a:extLst>
+              <a:ext uri="{28A0092B-C50C-407E-A947-70E740481C1C}">
+                <a14:useLocalDpi xmlns:a14="http://schemas.microsoft.com/office/drawing/2010/main" val="0"/>
+              </a:ext>
+            </a:extLst>
+          </a:blip>
+          <a:srcRect/>
+          <a:stretch>
+            <a:fillRect/>
+          </a:stretch>
+        </p:blipFill>
+        <p:spPr bwMode="auto">
+          <a:xfrm>
+            <a:off x="0" y="0"/>
+            <a:ext cx="1728192" cy="1728192"/>
+          </a:xfrm>
+          <a:prstGeom prst="rect">
+            <a:avLst/>
+          </a:prstGeom>
+          <a:noFill/>
+          <a:extLst>
+            <a:ext uri="{909E8E84-426E-40DD-AFC4-6F175D3DCCD1}">
+              <a14:hiddenFill xmlns:a14="http://schemas.microsoft.com/office/drawing/2010/main">
+                <a:solidFill>
+                  <a:srgbClr val="FFFFFF"/>
+                </a:solidFill>
+              </a14:hiddenFill>
+            </a:ext>
+          </a:extLst>
+        </p:spPr>
+      </p:pic>
+      <p:sp>
+        <p:nvSpPr>
+          <p:cNvPr id="5" name="Segnaposto contenuto 2"/>
+          <p:cNvSpPr>
+            <a:spLocks noGrp="1"/>
+          </p:cNvSpPr>
+          <p:nvPr>
+            <p:ph idx="1"/>
+          </p:nvPr>
+        </p:nvSpPr>
+        <p:spPr>
+          <a:xfrm>
+            <a:off x="457200" y="2276872"/>
+            <a:ext cx="8229600" cy="1512168"/>
+          </a:xfrm>
+        </p:spPr>
+        <p:txBody>
+          <a:bodyPr/>
+          <a:lstStyle/>
+          <a:p>
+            <a:pPr marL="0" indent="0">
+              <a:buNone/>
+            </a:pPr>
+            <a:r>
+              <a:rPr lang="en-US" dirty="0" smtClean="0">
+                <a:latin typeface="Times New Roman" pitchFamily="18" charset="0"/>
+                <a:cs typeface="Times New Roman" pitchFamily="18" charset="0"/>
+              </a:rPr>
+              <a:t>A Telegram Bot to advertise, book and manage appointments at the University of Trento.</a:t>
+            </a:r>
+          </a:p>
+        </p:txBody>
+      </p:sp>
+      <p:sp>
+        <p:nvSpPr>
+          <p:cNvPr id="7" name="Segnaposto contenuto 2"/>
+          <p:cNvSpPr txBox="1">
+            <a:spLocks/>
+          </p:cNvSpPr>
+          <p:nvPr/>
+        </p:nvSpPr>
+        <p:spPr>
+          <a:xfrm>
+            <a:off x="467544" y="3789040"/>
+            <a:ext cx="8229600" cy="2232248"/>
+          </a:xfrm>
+          <a:prstGeom prst="rect">
+            <a:avLst/>
+          </a:prstGeom>
+        </p:spPr>
+        <p:txBody>
+          <a:bodyPr vert="horz" lIns="91440" tIns="45720" rIns="91440" bIns="45720" rtlCol="0">
+            <a:normAutofit/>
+          </a:bodyPr>
+          <a:lstStyle>
+            <a:lvl1pPr marL="342900" indent="-342900" algn="l" defTabSz="914400" rtl="0" eaLnBrk="1" latinLnBrk="0" hangingPunct="1">
+              <a:spcBef>
+                <a:spcPct val="20000"/>
+              </a:spcBef>
+              <a:buFont typeface="Arial" pitchFamily="34" charset="0"/>
+              <a:buChar char="•"/>
+              <a:defRPr sz="3200" kern="1200">
+                <a:solidFill>
+                  <a:schemeClr val="tx1"/>
+                </a:solidFill>
+                <a:latin typeface="+mn-lt"/>
+                <a:ea typeface="+mn-ea"/>
+                <a:cs typeface="+mn-cs"/>
+              </a:defRPr>
+            </a:lvl1pPr>
+            <a:lvl2pPr marL="742950" indent="-285750" algn="l" defTabSz="914400" rtl="0" eaLnBrk="1" latinLnBrk="0" hangingPunct="1">
+              <a:spcBef>
+                <a:spcPct val="20000"/>
+              </a:spcBef>
+              <a:buFont typeface="Arial" pitchFamily="34" charset="0"/>
+              <a:buChar char="–"/>
+              <a:defRPr sz="2800" kern="1200">
+                <a:solidFill>
+                  <a:schemeClr val="tx1"/>
+                </a:solidFill>
+                <a:latin typeface="+mn-lt"/>
+                <a:ea typeface="+mn-ea"/>
+                <a:cs typeface="+mn-cs"/>
+              </a:defRPr>
+            </a:lvl2pPr>
+            <a:lvl3pPr marL="1143000" indent="-228600" algn="l" defTabSz="914400" rtl="0" eaLnBrk="1" latinLnBrk="0" hangingPunct="1">
+              <a:spcBef>
+                <a:spcPct val="20000"/>
+              </a:spcBef>
+              <a:buFont typeface="Arial" pitchFamily="34" charset="0"/>
+              <a:buChar char="•"/>
+              <a:defRPr sz="2400" kern="1200">
+                <a:solidFill>
+                  <a:schemeClr val="tx1"/>
+                </a:solidFill>
+                <a:latin typeface="+mn-lt"/>
+                <a:ea typeface="+mn-ea"/>
+                <a:cs typeface="+mn-cs"/>
+              </a:defRPr>
+            </a:lvl3pPr>
+            <a:lvl4pPr marL="1600200" indent="-228600" algn="l" defTabSz="914400" rtl="0" eaLnBrk="1" latinLnBrk="0" hangingPunct="1">
+              <a:spcBef>
+                <a:spcPct val="20000"/>
+              </a:spcBef>
+              <a:buFont typeface="Arial" pitchFamily="34" charset="0"/>
+              <a:buChar char="–"/>
+              <a:defRPr sz="2000" kern="1200">
+                <a:solidFill>
+                  <a:schemeClr val="tx1"/>
+                </a:solidFill>
+                <a:latin typeface="+mn-lt"/>
+                <a:ea typeface="+mn-ea"/>
+                <a:cs typeface="+mn-cs"/>
+              </a:defRPr>
+            </a:lvl4pPr>
+            <a:lvl5pPr marL="2057400" indent="-228600" algn="l" defTabSz="914400" rtl="0" eaLnBrk="1" latinLnBrk="0" hangingPunct="1">
+              <a:spcBef>
+                <a:spcPct val="20000"/>
+              </a:spcBef>
+              <a:buFont typeface="Arial" pitchFamily="34" charset="0"/>
+              <a:buChar char="»"/>
+              <a:defRPr sz="2000" kern="1200">
+                <a:solidFill>
+                  <a:schemeClr val="tx1"/>
+                </a:solidFill>
+                <a:latin typeface="+mn-lt"/>
+                <a:ea typeface="+mn-ea"/>
+                <a:cs typeface="+mn-cs"/>
+              </a:defRPr>
+            </a:lvl5pPr>
+            <a:lvl6pPr marL="2514600" indent="-228600" algn="l" defTabSz="914400" rtl="0" eaLnBrk="1" latinLnBrk="0" hangingPunct="1">
+              <a:spcBef>
+                <a:spcPct val="20000"/>
+              </a:spcBef>
+              <a:buFont typeface="Arial" pitchFamily="34" charset="0"/>
+              <a:buChar char="•"/>
+              <a:defRPr sz="2000" kern="1200">
+                <a:solidFill>
+                  <a:schemeClr val="tx1"/>
+                </a:solidFill>
+                <a:latin typeface="+mn-lt"/>
+                <a:ea typeface="+mn-ea"/>
+                <a:cs typeface="+mn-cs"/>
+              </a:defRPr>
+            </a:lvl6pPr>
+            <a:lvl7pPr marL="2971800" indent="-228600" algn="l" defTabSz="914400" rtl="0" eaLnBrk="1" latinLnBrk="0" hangingPunct="1">
+              <a:spcBef>
+                <a:spcPct val="20000"/>
+              </a:spcBef>
+              <a:buFont typeface="Arial" pitchFamily="34" charset="0"/>
+              <a:buChar char="•"/>
+              <a:defRPr sz="2000" kern="1200">
+                <a:solidFill>
+                  <a:schemeClr val="tx1"/>
+                </a:solidFill>
+                <a:latin typeface="+mn-lt"/>
+                <a:ea typeface="+mn-ea"/>
+                <a:cs typeface="+mn-cs"/>
+              </a:defRPr>
+            </a:lvl7pPr>
+            <a:lvl8pPr marL="3429000" indent="-228600" algn="l" defTabSz="914400" rtl="0" eaLnBrk="1" latinLnBrk="0" hangingPunct="1">
+              <a:spcBef>
+                <a:spcPct val="20000"/>
+              </a:spcBef>
+              <a:buFont typeface="Arial" pitchFamily="34" charset="0"/>
+              <a:buChar char="•"/>
+              <a:defRPr sz="2000" kern="1200">
+                <a:solidFill>
+                  <a:schemeClr val="tx1"/>
+                </a:solidFill>
+                <a:latin typeface="+mn-lt"/>
+                <a:ea typeface="+mn-ea"/>
+                <a:cs typeface="+mn-cs"/>
+              </a:defRPr>
+            </a:lvl8pPr>
+            <a:lvl9pPr marL="3886200" indent="-228600" algn="l" defTabSz="914400" rtl="0" eaLnBrk="1" latinLnBrk="0" hangingPunct="1">
+              <a:spcBef>
+                <a:spcPct val="20000"/>
+              </a:spcBef>
+              <a:buFont typeface="Arial" pitchFamily="34" charset="0"/>
+              <a:buChar char="•"/>
+              <a:defRPr sz="2000" kern="1200">
+                <a:solidFill>
+                  <a:schemeClr val="tx1"/>
+                </a:solidFill>
+                <a:latin typeface="+mn-lt"/>
+                <a:ea typeface="+mn-ea"/>
+                <a:cs typeface="+mn-cs"/>
+              </a:defRPr>
+            </a:lvl9pPr>
+          </a:lstStyle>
+          <a:p>
+            <a:pPr marL="0" indent="0">
+              <a:buFont typeface="Arial" pitchFamily="34" charset="0"/>
+              <a:buNone/>
+            </a:pPr>
+            <a:r>
+              <a:rPr lang="en-US" dirty="0" smtClean="0">
+                <a:latin typeface="Times New Roman" pitchFamily="18" charset="0"/>
+                <a:cs typeface="Times New Roman" pitchFamily="18" charset="0"/>
+              </a:rPr>
+              <a:t>Particularly suited for student-company events:</a:t>
+            </a:r>
+          </a:p>
+          <a:p>
+            <a:r>
+              <a:rPr lang="en-US" dirty="0" smtClean="0">
+                <a:latin typeface="Times New Roman" pitchFamily="18" charset="0"/>
+                <a:cs typeface="Times New Roman" pitchFamily="18" charset="0"/>
+              </a:rPr>
+              <a:t>Industrial Engineering Days</a:t>
+            </a:r>
+          </a:p>
+          <a:p>
+            <a:r>
+              <a:rPr lang="en-US" dirty="0" smtClean="0">
+                <a:latin typeface="Times New Roman" pitchFamily="18" charset="0"/>
+                <a:cs typeface="Times New Roman" pitchFamily="18" charset="0"/>
+              </a:rPr>
+              <a:t>ICT Days</a:t>
+            </a:r>
+            <a:endParaRPr lang="en-US" dirty="0" smtClean="0">
+              <a:latin typeface="Times New Roman" pitchFamily="18" charset="0"/>
+              <a:cs typeface="Times New Roman" pitchFamily="18" charset="0"/>
+            </a:endParaRPr>
+          </a:p>
+        </p:txBody>
+      </p:sp>
+    </p:spTree>
+    <p:extLst>
+      <p:ext uri="{BB962C8B-B14F-4D97-AF65-F5344CB8AC3E}">
+        <p14:creationId xmlns:p14="http://schemas.microsoft.com/office/powerpoint/2010/main" val="3457524202"/>
+      </p:ext>
+    </p:extLst>
+  </p:cSld>
+  <p:clrMapOvr>
+    <a:masterClrMapping/>
+  </p:clrMapOvr>
+  <p:timing>
+    <p:tnLst>
+      <p:par>
+        <p:cTn id="1" dur="indefinite" restart="never" nodeType="tmRoot"/>
+      </p:par>
+    </p:tnLst>
+  </p:timing>
+</p:sld>
+</file>
+
+<file path=ppt/slides/slide3.xml><?xml version="1.0" encoding="utf-8"?>
+<p:sld xmlns:a="http://schemas.openxmlformats.org/drawingml/2006/main" xmlns:r="http://schemas.openxmlformats.org/officeDocument/2006/relationships" xmlns:p="http://schemas.openxmlformats.org/presentationml/2006/main">
+  <p:cSld>
+    <p:spTree>
+      <p:nvGrpSpPr>
+        <p:cNvPr id="1" name=""/>
+        <p:cNvGrpSpPr/>
+        <p:nvPr/>
+      </p:nvGrpSpPr>
+      <p:grpSpPr>
+        <a:xfrm>
+          <a:off x="0" y="0"/>
+          <a:ext cx="0" cy="0"/>
+          <a:chOff x="0" y="0"/>
+          <a:chExt cx="0" cy="0"/>
+        </a:xfrm>
+      </p:grpSpPr>
+      <p:sp>
+        <p:nvSpPr>
+          <p:cNvPr id="2" name="Titolo 1"/>
+          <p:cNvSpPr>
+            <a:spLocks noGrp="1"/>
+          </p:cNvSpPr>
+          <p:nvPr>
+            <p:ph type="title"/>
+          </p:nvPr>
+        </p:nvSpPr>
+        <p:spPr>
+          <a:xfrm>
+            <a:off x="467544" y="274638"/>
+            <a:ext cx="8219256" cy="1143000"/>
+          </a:xfrm>
+        </p:spPr>
+        <p:txBody>
+          <a:bodyPr/>
+          <a:lstStyle/>
+          <a:p>
+            <a:r>
+              <a:rPr lang="en-US" b="1" dirty="0" smtClean="0">
+                <a:solidFill>
+                  <a:srgbClr val="C00000"/>
+                </a:solidFill>
+                <a:latin typeface="Times New Roman" pitchFamily="18" charset="0"/>
+                <a:cs typeface="Times New Roman" pitchFamily="18" charset="0"/>
+              </a:rPr>
+              <a:t>The Database</a:t>
+            </a:r>
+            <a:endParaRPr lang="en-US" b="1" dirty="0">
+              <a:solidFill>
+                <a:srgbClr val="C00000"/>
+              </a:solidFill>
+              <a:latin typeface="Times New Roman" pitchFamily="18" charset="0"/>
+              <a:cs typeface="Times New Roman" pitchFamily="18" charset="0"/>
+            </a:endParaRPr>
+          </a:p>
+        </p:txBody>
+      </p:sp>
+      <p:pic>
+        <p:nvPicPr>
+          <p:cNvPr id="4" name="Picture 2" descr="C:\Users\nives\AllFolders\UnitnBookingBot\pictures\unitn_logo.png"/>
+          <p:cNvPicPr>
+            <a:picLocks noChangeAspect="1" noChangeArrowheads="1"/>
+          </p:cNvPicPr>
+          <p:nvPr/>
+        </p:nvPicPr>
+        <p:blipFill>
+          <a:blip r:embed="rId2">
+            <a:lum bright="70000" contrast="-70000"/>
+            <a:extLst>
+              <a:ext uri="{28A0092B-C50C-407E-A947-70E740481C1C}">
+                <a14:useLocalDpi xmlns:a14="http://schemas.microsoft.com/office/drawing/2010/main" val="0"/>
+              </a:ext>
+            </a:extLst>
+          </a:blip>
+          <a:srcRect/>
+          <a:stretch>
+            <a:fillRect/>
+          </a:stretch>
+        </p:blipFill>
+        <p:spPr bwMode="auto">
+          <a:xfrm>
+            <a:off x="0" y="0"/>
+            <a:ext cx="1728192" cy="1728192"/>
+          </a:xfrm>
+          <a:prstGeom prst="rect">
+            <a:avLst/>
+          </a:prstGeom>
+          <a:noFill/>
+          <a:extLst>
+            <a:ext uri="{909E8E84-426E-40DD-AFC4-6F175D3DCCD1}">
+              <a14:hiddenFill xmlns:a14="http://schemas.microsoft.com/office/drawing/2010/main">
+                <a:solidFill>
+                  <a:srgbClr val="FFFFFF"/>
+                </a:solidFill>
+              </a14:hiddenFill>
+            </a:ext>
+          </a:extLst>
+        </p:spPr>
+      </p:pic>
+      <p:sp>
+        <p:nvSpPr>
+          <p:cNvPr id="5" name="Segnaposto contenuto 2"/>
+          <p:cNvSpPr>
+            <a:spLocks noGrp="1"/>
+          </p:cNvSpPr>
+          <p:nvPr>
+            <p:ph idx="1"/>
+          </p:nvPr>
+        </p:nvSpPr>
+        <p:spPr>
+          <a:xfrm>
+            <a:off x="457200" y="2276872"/>
+            <a:ext cx="8229600" cy="3849291"/>
+          </a:xfrm>
+        </p:spPr>
+        <p:txBody>
+          <a:bodyPr/>
+          <a:lstStyle/>
+          <a:p>
+            <a:pPr marL="0" indent="0">
+              <a:buNone/>
+            </a:pPr>
+            <a:r>
+              <a:rPr lang="en-US" dirty="0" smtClean="0">
+                <a:latin typeface="Times New Roman" pitchFamily="18" charset="0"/>
+                <a:cs typeface="Times New Roman" pitchFamily="18" charset="0"/>
+              </a:rPr>
+              <a:t>SQLite Database</a:t>
+            </a:r>
+          </a:p>
+          <a:p>
+            <a:r>
+              <a:rPr lang="en-US" dirty="0" smtClean="0">
+                <a:latin typeface="Times New Roman" pitchFamily="18" charset="0"/>
+                <a:cs typeface="Times New Roman" pitchFamily="18" charset="0"/>
+              </a:rPr>
+              <a:t>Structured Data</a:t>
+            </a:r>
+          </a:p>
+          <a:p>
+            <a:r>
+              <a:rPr lang="en-US" dirty="0" smtClean="0">
+                <a:latin typeface="Times New Roman" pitchFamily="18" charset="0"/>
+                <a:cs typeface="Times New Roman" pitchFamily="18" charset="0"/>
+              </a:rPr>
+              <a:t>High transaction volume</a:t>
+            </a:r>
+          </a:p>
+          <a:p>
+            <a:r>
+              <a:rPr lang="en-US" dirty="0" smtClean="0">
+                <a:latin typeface="Times New Roman" pitchFamily="18" charset="0"/>
+                <a:cs typeface="Times New Roman" pitchFamily="18" charset="0"/>
+              </a:rPr>
+              <a:t>Single file portability</a:t>
+            </a:r>
+          </a:p>
+          <a:p>
+            <a:r>
+              <a:rPr lang="en-US" dirty="0" smtClean="0">
+                <a:latin typeface="Times New Roman" pitchFamily="18" charset="0"/>
+                <a:cs typeface="Times New Roman" pitchFamily="18" charset="0"/>
+              </a:rPr>
+              <a:t>Natively available on Python</a:t>
+            </a:r>
+          </a:p>
+        </p:txBody>
+      </p:sp>
+    </p:spTree>
+    <p:extLst>
+      <p:ext uri="{BB962C8B-B14F-4D97-AF65-F5344CB8AC3E}">
+        <p14:creationId xmlns:p14="http://schemas.microsoft.com/office/powerpoint/2010/main" val="3876427191"/>
+      </p:ext>
+    </p:extLst>
+  </p:cSld>
+  <p:clrMapOvr>
+    <a:masterClrMapping/>
+  </p:clrMapOvr>
+  <p:timing>
+    <p:tnLst>
+      <p:par>
+        <p:cTn id="1" dur="indefinite" restart="never" nodeType="tmRoot"/>
+      </p:par>
+    </p:tnLst>
+  </p:timing>
+</p:sld>
+</file>
+
+<file path=ppt/slides/slide4.xml><?xml version="1.0" encoding="utf-8"?>
+<p:sld xmlns:a="http://schemas.openxmlformats.org/drawingml/2006/main" xmlns:r="http://schemas.openxmlformats.org/officeDocument/2006/relationships" xmlns:p="http://schemas.openxmlformats.org/presentationml/2006/main">
+  <p:cSld>
+    <p:spTree>
+      <p:nvGrpSpPr>
+        <p:cNvPr id="1" name=""/>
+        <p:cNvGrpSpPr/>
+        <p:nvPr/>
+      </p:nvGrpSpPr>
+      <p:grpSpPr>
+        <a:xfrm>
+          <a:off x="0" y="0"/>
+          <a:ext cx="0" cy="0"/>
+          <a:chOff x="0" y="0"/>
+          <a:chExt cx="0" cy="0"/>
+        </a:xfrm>
+      </p:grpSpPr>
+      <p:sp>
+        <p:nvSpPr>
+          <p:cNvPr id="2" name="Titolo 1"/>
+          <p:cNvSpPr>
+            <a:spLocks noGrp="1"/>
+          </p:cNvSpPr>
+          <p:nvPr>
+            <p:ph type="title"/>
+          </p:nvPr>
+        </p:nvSpPr>
+        <p:spPr>
+          <a:xfrm>
+            <a:off x="467544" y="274638"/>
+            <a:ext cx="8219256" cy="1143000"/>
+          </a:xfrm>
+        </p:spPr>
+        <p:txBody>
+          <a:bodyPr/>
+          <a:lstStyle/>
+          <a:p>
+            <a:r>
+              <a:rPr lang="en-US" b="1" smtClean="0">
+                <a:solidFill>
+                  <a:srgbClr val="C00000"/>
+                </a:solidFill>
+                <a:latin typeface="Times New Roman" pitchFamily="18" charset="0"/>
+                <a:cs typeface="Times New Roman" pitchFamily="18" charset="0"/>
+              </a:rPr>
+              <a:t>The Database</a:t>
+            </a:r>
+            <a:endParaRPr lang="en-US" b="1">
+              <a:solidFill>
+                <a:srgbClr val="C00000"/>
+              </a:solidFill>
+              <a:latin typeface="Times New Roman" pitchFamily="18" charset="0"/>
+              <a:cs typeface="Times New Roman" pitchFamily="18" charset="0"/>
+            </a:endParaRPr>
+          </a:p>
+        </p:txBody>
+      </p:sp>
+      <p:pic>
+        <p:nvPicPr>
+          <p:cNvPr id="4" name="Picture 2" descr="C:\Users\nives\AllFolders\UnitnBookingBot\pictures\unitn_logo.png"/>
+          <p:cNvPicPr>
+            <a:picLocks noChangeAspect="1" noChangeArrowheads="1"/>
+          </p:cNvPicPr>
+          <p:nvPr/>
+        </p:nvPicPr>
+        <p:blipFill>
+          <a:blip r:embed="rId2">
+            <a:lum bright="70000" contrast="-70000"/>
+            <a:extLst>
+              <a:ext uri="{28A0092B-C50C-407E-A947-70E740481C1C}">
+                <a14:useLocalDpi xmlns:a14="http://schemas.microsoft.com/office/drawing/2010/main" val="0"/>
+              </a:ext>
+            </a:extLst>
+          </a:blip>
+          <a:srcRect/>
+          <a:stretch>
+            <a:fillRect/>
+          </a:stretch>
+        </p:blipFill>
+        <p:spPr bwMode="auto">
+          <a:xfrm>
+            <a:off x="0" y="0"/>
+            <a:ext cx="1728192" cy="1728192"/>
+          </a:xfrm>
+          <a:prstGeom prst="rect">
+            <a:avLst/>
+          </a:prstGeom>
+          <a:noFill/>
+          <a:extLst>
+            <a:ext uri="{909E8E84-426E-40DD-AFC4-6F175D3DCCD1}">
+              <a14:hiddenFill xmlns:a14="http://schemas.microsoft.com/office/drawing/2010/main">
+                <a:solidFill>
+                  <a:srgbClr val="FFFFFF"/>
+                </a:solidFill>
+              </a14:hiddenFill>
+            </a:ext>
+          </a:extLst>
+        </p:spPr>
+      </p:pic>
+      <p:pic>
+        <p:nvPicPr>
+          <p:cNvPr id="2050" name="Picture 2" descr="C:\Users\nives\AllFolders\UnitnBookingBot\pictures\database.png"/>
+          <p:cNvPicPr>
+            <a:picLocks noChangeAspect="1" noChangeArrowheads="1"/>
+          </p:cNvPicPr>
+          <p:nvPr/>
+        </p:nvPicPr>
+        <p:blipFill>
+          <a:blip r:embed="rId3">
+            <a:extLst>
+              <a:ext uri="{28A0092B-C50C-407E-A947-70E740481C1C}">
+                <a14:useLocalDpi xmlns:a14="http://schemas.microsoft.com/office/drawing/2010/main" val="0"/>
+              </a:ext>
+            </a:extLst>
+          </a:blip>
+          <a:srcRect/>
+          <a:stretch>
+            <a:fillRect/>
+          </a:stretch>
+        </p:blipFill>
+        <p:spPr bwMode="auto">
+          <a:xfrm>
+            <a:off x="225023" y="2204864"/>
+            <a:ext cx="8736850" cy="3888432"/>
+          </a:xfrm>
+          <a:prstGeom prst="rect">
+            <a:avLst/>
+          </a:prstGeom>
+          <a:noFill/>
+          <a:ln>
+            <a:noFill/>
+          </a:ln>
+          <a:extLst>
+            <a:ext uri="{909E8E84-426E-40DD-AFC4-6F175D3DCCD1}">
+              <a14:hiddenFill xmlns:a14="http://schemas.microsoft.com/office/drawing/2010/main">
+                <a:solidFill>
+                  <a:srgbClr val="FFFFFF"/>
+                </a:solidFill>
+              </a14:hiddenFill>
+            </a:ext>
+          </a:extLst>
+        </p:spPr>
+      </p:pic>
+    </p:spTree>
+    <p:extLst>
+      <p:ext uri="{BB962C8B-B14F-4D97-AF65-F5344CB8AC3E}">
+        <p14:creationId xmlns:p14="http://schemas.microsoft.com/office/powerpoint/2010/main" val="3744701633"/>
+      </p:ext>
+    </p:extLst>
+  </p:cSld>
+  <p:clrMapOvr>
+    <a:masterClrMapping/>
+  </p:clrMapOvr>
+  <p:timing>
+    <p:tnLst>
+      <p:par>
+        <p:cTn id="1" dur="indefinite" restart="never" nodeType="tmRoot"/>
+      </p:par>
+    </p:tnLst>
+  </p:timing>
+</p:sld>
+</file>
+
+<file path=ppt/slides/slide5.xml><?xml version="1.0" encoding="utf-8"?>
+<p:sld xmlns:a="http://schemas.openxmlformats.org/drawingml/2006/main" xmlns:r="http://schemas.openxmlformats.org/officeDocument/2006/relationships" xmlns:p="http://schemas.openxmlformats.org/presentationml/2006/main">
+  <p:cSld>
+    <p:spTree>
+      <p:nvGrpSpPr>
+        <p:cNvPr id="1" name=""/>
+        <p:cNvGrpSpPr/>
+        <p:nvPr/>
+      </p:nvGrpSpPr>
+      <p:grpSpPr>
+        <a:xfrm>
+          <a:off x="0" y="0"/>
+          <a:ext cx="0" cy="0"/>
+          <a:chOff x="0" y="0"/>
+          <a:chExt cx="0" cy="0"/>
+        </a:xfrm>
+      </p:grpSpPr>
+      <p:sp>
+        <p:nvSpPr>
+          <p:cNvPr id="2" name="Titolo 1"/>
+          <p:cNvSpPr>
+            <a:spLocks noGrp="1"/>
+          </p:cNvSpPr>
+          <p:nvPr>
+            <p:ph type="title"/>
+          </p:nvPr>
+        </p:nvSpPr>
+        <p:spPr>
+          <a:xfrm>
+            <a:off x="467544" y="274638"/>
+            <a:ext cx="8219256" cy="1143000"/>
+          </a:xfrm>
+        </p:spPr>
+        <p:txBody>
+          <a:bodyPr/>
+          <a:lstStyle/>
+          <a:p>
+            <a:r>
+              <a:rPr lang="en-US" b="1" dirty="0" smtClean="0">
+                <a:solidFill>
+                  <a:srgbClr val="C00000"/>
+                </a:solidFill>
+                <a:latin typeface="Times New Roman" pitchFamily="18" charset="0"/>
+                <a:cs typeface="Times New Roman" pitchFamily="18" charset="0"/>
+              </a:rPr>
+              <a:t>The Telegram Bot API</a:t>
+            </a:r>
+            <a:endParaRPr lang="en-US" b="1" dirty="0">
+              <a:solidFill>
+                <a:srgbClr val="C00000"/>
+              </a:solidFill>
+              <a:latin typeface="Times New Roman" pitchFamily="18" charset="0"/>
+              <a:cs typeface="Times New Roman" pitchFamily="18" charset="0"/>
+            </a:endParaRPr>
+          </a:p>
+        </p:txBody>
+      </p:sp>
+      <p:pic>
+        <p:nvPicPr>
+          <p:cNvPr id="4" name="Picture 2" descr="C:\Users\nives\AllFolders\UnitnBookingBot\pictures\unitn_logo.png"/>
+          <p:cNvPicPr>
+            <a:picLocks noChangeAspect="1" noChangeArrowheads="1"/>
+          </p:cNvPicPr>
+          <p:nvPr/>
+        </p:nvPicPr>
+        <p:blipFill>
+          <a:blip r:embed="rId2">
+            <a:lum bright="70000" contrast="-70000"/>
+            <a:extLst>
+              <a:ext uri="{28A0092B-C50C-407E-A947-70E740481C1C}">
+                <a14:useLocalDpi xmlns:a14="http://schemas.microsoft.com/office/drawing/2010/main" val="0"/>
+              </a:ext>
+            </a:extLst>
+          </a:blip>
+          <a:srcRect/>
+          <a:stretch>
+            <a:fillRect/>
+          </a:stretch>
+        </p:blipFill>
+        <p:spPr bwMode="auto">
+          <a:xfrm>
+            <a:off x="0" y="0"/>
+            <a:ext cx="1728192" cy="1728192"/>
+          </a:xfrm>
+          <a:prstGeom prst="rect">
+            <a:avLst/>
+          </a:prstGeom>
+          <a:noFill/>
+          <a:extLst>
+            <a:ext uri="{909E8E84-426E-40DD-AFC4-6F175D3DCCD1}">
+              <a14:hiddenFill xmlns:a14="http://schemas.microsoft.com/office/drawing/2010/main">
+                <a:solidFill>
+                  <a:srgbClr val="FFFFFF"/>
+                </a:solidFill>
+              </a14:hiddenFill>
+            </a:ext>
+          </a:extLst>
+        </p:spPr>
+      </p:pic>
+      <p:sp>
+        <p:nvSpPr>
+          <p:cNvPr id="5" name="Segnaposto contenuto 2"/>
+          <p:cNvSpPr>
+            <a:spLocks noGrp="1"/>
+          </p:cNvSpPr>
+          <p:nvPr>
+            <p:ph idx="1"/>
+          </p:nvPr>
+        </p:nvSpPr>
+        <p:spPr>
+          <a:xfrm>
+            <a:off x="446856" y="1916832"/>
+            <a:ext cx="8229600" cy="3849291"/>
+          </a:xfrm>
+        </p:spPr>
+        <p:txBody>
+          <a:bodyPr/>
+          <a:lstStyle/>
+          <a:p>
+            <a:pPr marL="0" indent="0">
+              <a:buNone/>
+            </a:pPr>
+            <a:r>
+              <a:rPr lang="en-US" dirty="0" smtClean="0">
+                <a:latin typeface="Times New Roman" pitchFamily="18" charset="0"/>
+                <a:cs typeface="Times New Roman" pitchFamily="18" charset="0"/>
+              </a:rPr>
+              <a:t>Stateless API</a:t>
+            </a:r>
+          </a:p>
+          <a:p>
+            <a:r>
+              <a:rPr lang="en-US" dirty="0" smtClean="0">
+                <a:latin typeface="Times New Roman" pitchFamily="18" charset="0"/>
+                <a:cs typeface="Times New Roman" pitchFamily="18" charset="0"/>
+              </a:rPr>
+              <a:t>Message Handlers</a:t>
+            </a:r>
+            <a:endParaRPr lang="en-US" dirty="0">
+              <a:latin typeface="Times New Roman" pitchFamily="18" charset="0"/>
+              <a:cs typeface="Times New Roman" pitchFamily="18" charset="0"/>
+            </a:endParaRPr>
+          </a:p>
+          <a:p>
+            <a:r>
+              <a:rPr lang="en-US" dirty="0" smtClean="0">
+                <a:latin typeface="Times New Roman" pitchFamily="18" charset="0"/>
+                <a:cs typeface="Times New Roman" pitchFamily="18" charset="0"/>
+              </a:rPr>
+              <a:t>Command Handlers</a:t>
+            </a:r>
+          </a:p>
+          <a:p>
+            <a:r>
+              <a:rPr lang="en-US" dirty="0" smtClean="0">
+                <a:latin typeface="Times New Roman" pitchFamily="18" charset="0"/>
+                <a:cs typeface="Times New Roman" pitchFamily="18" charset="0"/>
+              </a:rPr>
+              <a:t>Callback Query Handlers</a:t>
+            </a:r>
+          </a:p>
+        </p:txBody>
+      </p:sp>
+      <p:pic>
+        <p:nvPicPr>
+          <p:cNvPr id="3074" name="Picture 2" descr="C:\Users\nives\AllFolders\UnitnBookingBot\pictures\whoami_handler.png"/>
+          <p:cNvPicPr>
+            <a:picLocks noChangeAspect="1" noChangeArrowheads="1"/>
+          </p:cNvPicPr>
+          <p:nvPr/>
+        </p:nvPicPr>
+        <p:blipFill>
+          <a:blip r:embed="rId3">
+            <a:extLst>
+              <a:ext uri="{28A0092B-C50C-407E-A947-70E740481C1C}">
+                <a14:useLocalDpi xmlns:a14="http://schemas.microsoft.com/office/drawing/2010/main" val="0"/>
+              </a:ext>
+            </a:extLst>
+          </a:blip>
+          <a:srcRect/>
+          <a:stretch>
+            <a:fillRect/>
+          </a:stretch>
+        </p:blipFill>
+        <p:spPr bwMode="auto">
+          <a:xfrm>
+            <a:off x="4092893" y="1771599"/>
+            <a:ext cx="4832537" cy="1296144"/>
+          </a:xfrm>
+          <a:prstGeom prst="rect">
+            <a:avLst/>
+          </a:prstGeom>
+          <a:noFill/>
+          <a:extLst>
+            <a:ext uri="{909E8E84-426E-40DD-AFC4-6F175D3DCCD1}">
+              <a14:hiddenFill xmlns:a14="http://schemas.microsoft.com/office/drawing/2010/main">
+                <a:solidFill>
+                  <a:srgbClr val="FFFFFF"/>
+                </a:solidFill>
+              </a14:hiddenFill>
+            </a:ext>
+          </a:extLst>
+        </p:spPr>
+      </p:pic>
+      <p:pic>
+        <p:nvPicPr>
+          <p:cNvPr id="3075" name="Picture 3" descr="C:\Users\nives\AllFolders\UnitnBookingBot\pictures\whoami_function.png"/>
+          <p:cNvPicPr>
+            <a:picLocks noChangeAspect="1" noChangeArrowheads="1"/>
+          </p:cNvPicPr>
+          <p:nvPr/>
+        </p:nvPicPr>
+        <p:blipFill>
+          <a:blip r:embed="rId4">
+            <a:extLst>
+              <a:ext uri="{28A0092B-C50C-407E-A947-70E740481C1C}">
+                <a14:useLocalDpi xmlns:a14="http://schemas.microsoft.com/office/drawing/2010/main" val="0"/>
+              </a:ext>
+            </a:extLst>
+          </a:blip>
+          <a:srcRect/>
+          <a:stretch>
+            <a:fillRect/>
+          </a:stretch>
+        </p:blipFill>
+        <p:spPr bwMode="auto">
+          <a:xfrm>
+            <a:off x="1043607" y="4653136"/>
+            <a:ext cx="7012671" cy="1656184"/>
+          </a:xfrm>
+          <a:prstGeom prst="rect">
+            <a:avLst/>
+          </a:prstGeom>
+          <a:noFill/>
+          <a:extLst>
+            <a:ext uri="{909E8E84-426E-40DD-AFC4-6F175D3DCCD1}">
+              <a14:hiddenFill xmlns:a14="http://schemas.microsoft.com/office/drawing/2010/main">
+                <a:solidFill>
+                  <a:srgbClr val="FFFFFF"/>
+                </a:solidFill>
+              </a14:hiddenFill>
+            </a:ext>
+          </a:extLst>
+        </p:spPr>
+      </p:pic>
+    </p:spTree>
+    <p:extLst>
+      <p:ext uri="{BB962C8B-B14F-4D97-AF65-F5344CB8AC3E}">
+        <p14:creationId xmlns:p14="http://schemas.microsoft.com/office/powerpoint/2010/main" val="2590584274"/>
+      </p:ext>
+    </p:extLst>
+  </p:cSld>
+  <p:clrMapOvr>
+    <a:masterClrMapping/>
+  </p:clrMapOvr>
+  <p:timing>
+    <p:tnLst>
+      <p:par>
+        <p:cTn id="1" dur="indefinite" restart="never" nodeType="tmRoot"/>
+      </p:par>
+    </p:tnLst>
+  </p:timing>
+</p:sld>
+</file>
+
+<file path=ppt/slides/slide6.xml><?xml version="1.0" encoding="utf-8"?>
+<p:sld xmlns:a="http://schemas.openxmlformats.org/drawingml/2006/main" xmlns:r="http://schemas.openxmlformats.org/officeDocument/2006/relationships" xmlns:p="http://schemas.openxmlformats.org/presentationml/2006/main">
+  <p:cSld>
+    <p:spTree>
+      <p:nvGrpSpPr>
+        <p:cNvPr id="1" name=""/>
+        <p:cNvGrpSpPr/>
+        <p:nvPr/>
+      </p:nvGrpSpPr>
+      <p:grpSpPr>
+        <a:xfrm>
+          <a:off x="0" y="0"/>
+          <a:ext cx="0" cy="0"/>
+          <a:chOff x="0" y="0"/>
+          <a:chExt cx="0" cy="0"/>
+        </a:xfrm>
+      </p:grpSpPr>
+      <p:sp>
+        <p:nvSpPr>
+          <p:cNvPr id="2" name="Titolo 1"/>
+          <p:cNvSpPr>
+            <a:spLocks noGrp="1"/>
+          </p:cNvSpPr>
+          <p:nvPr>
+            <p:ph type="title"/>
+          </p:nvPr>
+        </p:nvSpPr>
+        <p:spPr>
+          <a:xfrm>
+            <a:off x="467544" y="274638"/>
+            <a:ext cx="8219256" cy="1143000"/>
+          </a:xfrm>
+        </p:spPr>
+        <p:txBody>
+          <a:bodyPr/>
+          <a:lstStyle/>
+          <a:p>
+            <a:r>
+              <a:rPr lang="en-US" b="1" dirty="0" smtClean="0">
+                <a:solidFill>
+                  <a:srgbClr val="C00000"/>
+                </a:solidFill>
+                <a:latin typeface="Times New Roman" pitchFamily="18" charset="0"/>
+                <a:cs typeface="Times New Roman" pitchFamily="18" charset="0"/>
+              </a:rPr>
+              <a:t>The Telegram Bot API</a:t>
+            </a:r>
+            <a:endParaRPr lang="en-US" b="1" dirty="0">
+              <a:solidFill>
+                <a:srgbClr val="C00000"/>
+              </a:solidFill>
+              <a:latin typeface="Times New Roman" pitchFamily="18" charset="0"/>
+              <a:cs typeface="Times New Roman" pitchFamily="18" charset="0"/>
+            </a:endParaRPr>
+          </a:p>
+        </p:txBody>
+      </p:sp>
+      <p:pic>
+        <p:nvPicPr>
+          <p:cNvPr id="4" name="Picture 2" descr="C:\Users\nives\AllFolders\UnitnBookingBot\pictures\unitn_logo.png"/>
+          <p:cNvPicPr>
+            <a:picLocks noChangeAspect="1" noChangeArrowheads="1"/>
+          </p:cNvPicPr>
+          <p:nvPr/>
+        </p:nvPicPr>
+        <p:blipFill>
+          <a:blip r:embed="rId2">
+            <a:lum bright="70000" contrast="-70000"/>
+            <a:extLst>
+              <a:ext uri="{28A0092B-C50C-407E-A947-70E740481C1C}">
+                <a14:useLocalDpi xmlns:a14="http://schemas.microsoft.com/office/drawing/2010/main" val="0"/>
+              </a:ext>
+            </a:extLst>
+          </a:blip>
+          <a:srcRect/>
+          <a:stretch>
+            <a:fillRect/>
+          </a:stretch>
+        </p:blipFill>
+        <p:spPr bwMode="auto">
+          <a:xfrm>
+            <a:off x="0" y="0"/>
+            <a:ext cx="1728192" cy="1728192"/>
+          </a:xfrm>
+          <a:prstGeom prst="rect">
+            <a:avLst/>
+          </a:prstGeom>
+          <a:noFill/>
+          <a:extLst>
+            <a:ext uri="{909E8E84-426E-40DD-AFC4-6F175D3DCCD1}">
+              <a14:hiddenFill xmlns:a14="http://schemas.microsoft.com/office/drawing/2010/main">
+                <a:solidFill>
+                  <a:srgbClr val="FFFFFF"/>
+                </a:solidFill>
+              </a14:hiddenFill>
+            </a:ext>
+          </a:extLst>
+        </p:spPr>
+      </p:pic>
+      <p:sp>
+        <p:nvSpPr>
+          <p:cNvPr id="5" name="Segnaposto contenuto 2"/>
+          <p:cNvSpPr>
+            <a:spLocks noGrp="1"/>
+          </p:cNvSpPr>
+          <p:nvPr>
+            <p:ph idx="1"/>
+          </p:nvPr>
+        </p:nvSpPr>
+        <p:spPr>
+          <a:xfrm>
+            <a:off x="435471" y="1916833"/>
+            <a:ext cx="8229600" cy="1368152"/>
+          </a:xfrm>
+        </p:spPr>
+        <p:txBody>
+          <a:bodyPr/>
+          <a:lstStyle/>
+          <a:p>
+            <a:pPr marL="0" indent="0">
+              <a:buNone/>
+            </a:pPr>
+            <a:r>
+              <a:rPr lang="en-US" dirty="0" err="1" smtClean="0">
+                <a:latin typeface="Times New Roman" pitchFamily="18" charset="0"/>
+                <a:cs typeface="Times New Roman" pitchFamily="18" charset="0"/>
+              </a:rPr>
+              <a:t>Stateful</a:t>
+            </a:r>
+            <a:r>
+              <a:rPr lang="en-US" dirty="0" smtClean="0">
+                <a:latin typeface="Times New Roman" pitchFamily="18" charset="0"/>
+                <a:cs typeface="Times New Roman" pitchFamily="18" charset="0"/>
+              </a:rPr>
+              <a:t> API</a:t>
+            </a:r>
+          </a:p>
+          <a:p>
+            <a:r>
+              <a:rPr lang="en-US" dirty="0" smtClean="0">
+                <a:latin typeface="Times New Roman" pitchFamily="18" charset="0"/>
+                <a:cs typeface="Times New Roman" pitchFamily="18" charset="0"/>
+              </a:rPr>
+              <a:t>Conversation Handlers</a:t>
+            </a:r>
+            <a:endParaRPr lang="en-US" dirty="0">
+              <a:latin typeface="Times New Roman" pitchFamily="18" charset="0"/>
+              <a:cs typeface="Times New Roman" pitchFamily="18" charset="0"/>
+            </a:endParaRPr>
+          </a:p>
+        </p:txBody>
+      </p:sp>
+      <p:pic>
+        <p:nvPicPr>
+          <p:cNvPr id="4098" name="Picture 2" descr="C:\Users\nives\AllFolders\UnitnBookingBot\pictures\book_handler.png"/>
+          <p:cNvPicPr>
+            <a:picLocks noChangeAspect="1" noChangeArrowheads="1"/>
+          </p:cNvPicPr>
+          <p:nvPr/>
+        </p:nvPicPr>
+        <p:blipFill>
+          <a:blip r:embed="rId3">
+            <a:extLst>
+              <a:ext uri="{28A0092B-C50C-407E-A947-70E740481C1C}">
+                <a14:useLocalDpi xmlns:a14="http://schemas.microsoft.com/office/drawing/2010/main" val="0"/>
+              </a:ext>
+            </a:extLst>
+          </a:blip>
+          <a:srcRect/>
+          <a:stretch>
+            <a:fillRect/>
+          </a:stretch>
+        </p:blipFill>
+        <p:spPr bwMode="auto">
+          <a:xfrm>
+            <a:off x="864096" y="3284984"/>
+            <a:ext cx="7372350" cy="3263900"/>
+          </a:xfrm>
+          <a:prstGeom prst="rect">
+            <a:avLst/>
+          </a:prstGeom>
+          <a:noFill/>
+          <a:extLst>
+            <a:ext uri="{909E8E84-426E-40DD-AFC4-6F175D3DCCD1}">
+              <a14:hiddenFill xmlns:a14="http://schemas.microsoft.com/office/drawing/2010/main">
+                <a:solidFill>
+                  <a:srgbClr val="FFFFFF"/>
+                </a:solidFill>
+              </a14:hiddenFill>
+            </a:ext>
+          </a:extLst>
+        </p:spPr>
+      </p:pic>
+    </p:spTree>
+    <p:extLst>
+      <p:ext uri="{BB962C8B-B14F-4D97-AF65-F5344CB8AC3E}">
+        <p14:creationId xmlns:p14="http://schemas.microsoft.com/office/powerpoint/2010/main" val="1414804366"/>
+      </p:ext>
+    </p:extLst>
+  </p:cSld>
+  <p:clrMapOvr>
+    <a:masterClrMapping/>
+  </p:clrMapOvr>
+  <p:timing>
+    <p:tnLst>
+      <p:par>
+        <p:cTn id="1" dur="indefinite" restart="never" nodeType="tmRoot"/>
+      </p:par>
+    </p:tnLst>
+  </p:timing>
+</p:sld>
+</file>
+
+<file path=ppt/slides/slide7.xml><?xml version="1.0" encoding="utf-8"?>
+<p:sld xmlns:a="http://schemas.openxmlformats.org/drawingml/2006/main" xmlns:r="http://schemas.openxmlformats.org/officeDocument/2006/relationships" xmlns:p="http://schemas.openxmlformats.org/presentationml/2006/main">
+  <p:cSld>
+    <p:spTree>
+      <p:nvGrpSpPr>
+        <p:cNvPr id="1" name=""/>
+        <p:cNvGrpSpPr/>
+        <p:nvPr/>
+      </p:nvGrpSpPr>
+      <p:grpSpPr>
+        <a:xfrm>
+          <a:off x="0" y="0"/>
+          <a:ext cx="0" cy="0"/>
+          <a:chOff x="0" y="0"/>
+          <a:chExt cx="0" cy="0"/>
+        </a:xfrm>
+      </p:grpSpPr>
+      <p:sp>
+        <p:nvSpPr>
+          <p:cNvPr id="2" name="Titolo 1"/>
+          <p:cNvSpPr>
+            <a:spLocks noGrp="1"/>
+          </p:cNvSpPr>
+          <p:nvPr>
+            <p:ph type="title"/>
+          </p:nvPr>
+        </p:nvSpPr>
+        <p:spPr>
+          <a:xfrm>
+            <a:off x="467544" y="274638"/>
+            <a:ext cx="8219256" cy="1143000"/>
+          </a:xfrm>
+        </p:spPr>
+        <p:txBody>
+          <a:bodyPr/>
+          <a:lstStyle/>
+          <a:p>
+            <a:r>
+              <a:rPr lang="en-US" b="1" dirty="0" smtClean="0">
+                <a:solidFill>
+                  <a:srgbClr val="C00000"/>
+                </a:solidFill>
+                <a:latin typeface="Times New Roman" pitchFamily="18" charset="0"/>
+                <a:cs typeface="Times New Roman" pitchFamily="18" charset="0"/>
+              </a:rPr>
+              <a:t>The Documentation</a:t>
+            </a:r>
+            <a:endParaRPr lang="en-US" b="1" dirty="0">
+              <a:solidFill>
+                <a:srgbClr val="C00000"/>
+              </a:solidFill>
+              <a:latin typeface="Times New Roman" pitchFamily="18" charset="0"/>
+              <a:cs typeface="Times New Roman" pitchFamily="18" charset="0"/>
+            </a:endParaRPr>
+          </a:p>
+        </p:txBody>
+      </p:sp>
+      <p:pic>
+        <p:nvPicPr>
+          <p:cNvPr id="4" name="Picture 2" descr="C:\Users\nives\AllFolders\UnitnBookingBot\pictures\unitn_logo.png"/>
+          <p:cNvPicPr>
+            <a:picLocks noChangeAspect="1" noChangeArrowheads="1"/>
+          </p:cNvPicPr>
+          <p:nvPr/>
+        </p:nvPicPr>
+        <p:blipFill>
+          <a:blip r:embed="rId2">
+            <a:lum bright="70000" contrast="-70000"/>
+            <a:extLst>
+              <a:ext uri="{28A0092B-C50C-407E-A947-70E740481C1C}">
+                <a14:useLocalDpi xmlns:a14="http://schemas.microsoft.com/office/drawing/2010/main" val="0"/>
+              </a:ext>
+            </a:extLst>
+          </a:blip>
+          <a:srcRect/>
+          <a:stretch>
+            <a:fillRect/>
+          </a:stretch>
+        </p:blipFill>
+        <p:spPr bwMode="auto">
+          <a:xfrm>
+            <a:off x="0" y="0"/>
+            <a:ext cx="1728192" cy="1728192"/>
+          </a:xfrm>
+          <a:prstGeom prst="rect">
+            <a:avLst/>
+          </a:prstGeom>
+          <a:noFill/>
+          <a:extLst>
+            <a:ext uri="{909E8E84-426E-40DD-AFC4-6F175D3DCCD1}">
+              <a14:hiddenFill xmlns:a14="http://schemas.microsoft.com/office/drawing/2010/main">
+                <a:solidFill>
+                  <a:srgbClr val="FFFFFF"/>
+                </a:solidFill>
+              </a14:hiddenFill>
+            </a:ext>
+          </a:extLst>
+        </p:spPr>
+      </p:pic>
+      <p:sp>
+        <p:nvSpPr>
+          <p:cNvPr id="5" name="Segnaposto contenuto 2"/>
+          <p:cNvSpPr>
+            <a:spLocks noGrp="1"/>
+          </p:cNvSpPr>
+          <p:nvPr>
+            <p:ph idx="1"/>
+          </p:nvPr>
+        </p:nvSpPr>
+        <p:spPr>
+          <a:xfrm>
+            <a:off x="435471" y="1916832"/>
+            <a:ext cx="8229600" cy="1872208"/>
+          </a:xfrm>
+        </p:spPr>
+        <p:txBody>
+          <a:bodyPr>
+            <a:normAutofit/>
+          </a:bodyPr>
+          <a:lstStyle/>
+          <a:p>
+            <a:pPr marL="0" indent="0">
+              <a:buNone/>
+            </a:pPr>
+            <a:r>
+              <a:rPr lang="en-US" dirty="0" smtClean="0">
+                <a:latin typeface="Times New Roman" pitchFamily="18" charset="0"/>
+                <a:cs typeface="Times New Roman" pitchFamily="18" charset="0"/>
+              </a:rPr>
+              <a:t>Full </a:t>
+            </a:r>
+            <a:r>
+              <a:rPr lang="en-US" dirty="0" err="1" smtClean="0">
+                <a:latin typeface="Times New Roman" pitchFamily="18" charset="0"/>
+                <a:cs typeface="Times New Roman" pitchFamily="18" charset="0"/>
+              </a:rPr>
+              <a:t>Doxygen</a:t>
+            </a:r>
+            <a:r>
+              <a:rPr lang="en-US" dirty="0" smtClean="0">
+                <a:latin typeface="Times New Roman" pitchFamily="18" charset="0"/>
+                <a:cs typeface="Times New Roman" pitchFamily="18" charset="0"/>
+              </a:rPr>
+              <a:t> documentation</a:t>
+            </a:r>
+          </a:p>
+          <a:p>
+            <a:r>
+              <a:rPr lang="en-US" dirty="0" smtClean="0">
+                <a:latin typeface="Times New Roman" pitchFamily="18" charset="0"/>
+                <a:cs typeface="Times New Roman" pitchFamily="18" charset="0"/>
+              </a:rPr>
+              <a:t>All functions have description</a:t>
+            </a:r>
+          </a:p>
+          <a:p>
+            <a:r>
+              <a:rPr lang="en-US" dirty="0" smtClean="0">
+                <a:latin typeface="Times New Roman" pitchFamily="18" charset="0"/>
+                <a:cs typeface="Times New Roman" pitchFamily="18" charset="0"/>
+              </a:rPr>
+              <a:t>Available online trough </a:t>
+            </a:r>
+            <a:r>
+              <a:rPr lang="en-US" dirty="0" err="1" smtClean="0">
+                <a:latin typeface="Times New Roman" pitchFamily="18" charset="0"/>
+                <a:cs typeface="Times New Roman" pitchFamily="18" charset="0"/>
+              </a:rPr>
+              <a:t>GitHub</a:t>
+            </a:r>
+            <a:r>
+              <a:rPr lang="en-US" dirty="0" smtClean="0">
+                <a:latin typeface="Times New Roman" pitchFamily="18" charset="0"/>
+                <a:cs typeface="Times New Roman" pitchFamily="18" charset="0"/>
+              </a:rPr>
+              <a:t> pages</a:t>
+            </a:r>
+            <a:endParaRPr lang="en-US" dirty="0">
+              <a:latin typeface="Times New Roman" pitchFamily="18" charset="0"/>
+              <a:cs typeface="Times New Roman" pitchFamily="18" charset="0"/>
+            </a:endParaRPr>
+          </a:p>
+        </p:txBody>
+      </p:sp>
+      <p:pic>
+        <p:nvPicPr>
+          <p:cNvPr id="5122" name="Picture 2" descr="C:\Users\nives\AllFolders\UnitnBookingBot\pictures\documentation.png"/>
+          <p:cNvPicPr>
+            <a:picLocks noChangeAspect="1" noChangeArrowheads="1"/>
+          </p:cNvPicPr>
+          <p:nvPr/>
+        </p:nvPicPr>
+        <p:blipFill>
+          <a:blip r:embed="rId3" cstate="print">
+            <a:extLst>
+              <a:ext uri="{28A0092B-C50C-407E-A947-70E740481C1C}">
+                <a14:useLocalDpi xmlns:a14="http://schemas.microsoft.com/office/drawing/2010/main" val="0"/>
+              </a:ext>
+            </a:extLst>
+          </a:blip>
+          <a:srcRect/>
+          <a:stretch>
+            <a:fillRect/>
+          </a:stretch>
+        </p:blipFill>
+        <p:spPr bwMode="auto">
+          <a:xfrm>
+            <a:off x="827584" y="3704931"/>
+            <a:ext cx="7431494" cy="3036437"/>
+          </a:xfrm>
+          <a:prstGeom prst="rect">
+            <a:avLst/>
+          </a:prstGeom>
+          <a:noFill/>
+          <a:ln>
+            <a:solidFill>
+              <a:schemeClr val="tx1"/>
+            </a:solidFill>
+          </a:ln>
+          <a:extLst>
+            <a:ext uri="{909E8E84-426E-40DD-AFC4-6F175D3DCCD1}">
+              <a14:hiddenFill xmlns:a14="http://schemas.microsoft.com/office/drawing/2010/main">
+                <a:solidFill>
+                  <a:srgbClr val="FFFFFF"/>
+                </a:solidFill>
+              </a14:hiddenFill>
+            </a:ext>
+          </a:extLst>
+        </p:spPr>
+      </p:pic>
+    </p:spTree>
+    <p:extLst>
+      <p:ext uri="{BB962C8B-B14F-4D97-AF65-F5344CB8AC3E}">
+        <p14:creationId xmlns:p14="http://schemas.microsoft.com/office/powerpoint/2010/main" val="1289464251"/>
+      </p:ext>
+    </p:extLst>
+  </p:cSld>
+  <p:clrMapOvr>
+    <a:masterClrMapping/>
+  </p:clrMapOvr>
+  <p:timing>
+    <p:tnLst>
+      <p:par>
+        <p:cTn id="1" dur="indefinite" restart="never" nodeType="tmRoot"/>
+      </p:par>
+    </p:tnLst>
+  </p:timing>
+</p:sld>
+</file>
+
+<file path=ppt/slides/slide8.xml><?xml version="1.0" encoding="utf-8"?>
+<p:sld xmlns:a="http://schemas.openxmlformats.org/drawingml/2006/main" xmlns:r="http://schemas.openxmlformats.org/officeDocument/2006/relationships" xmlns:p="http://schemas.openxmlformats.org/presentationml/2006/main">
+  <p:cSld>
+    <p:spTree>
+      <p:nvGrpSpPr>
+        <p:cNvPr id="1" name=""/>
+        <p:cNvGrpSpPr/>
+        <p:nvPr/>
+      </p:nvGrpSpPr>
+      <p:grpSpPr>
+        <a:xfrm>
+          <a:off x="0" y="0"/>
+          <a:ext cx="0" cy="0"/>
+          <a:chOff x="0" y="0"/>
+          <a:chExt cx="0" cy="0"/>
+        </a:xfrm>
+      </p:grpSpPr>
+      <p:sp>
+        <p:nvSpPr>
+          <p:cNvPr id="2" name="Titolo 1"/>
+          <p:cNvSpPr>
+            <a:spLocks noGrp="1"/>
+          </p:cNvSpPr>
+          <p:nvPr>
+            <p:ph type="title"/>
+          </p:nvPr>
+        </p:nvSpPr>
+        <p:spPr>
+          <a:xfrm>
+            <a:off x="467544" y="274638"/>
+            <a:ext cx="8219256" cy="1143000"/>
+          </a:xfrm>
+        </p:spPr>
+        <p:txBody>
+          <a:bodyPr/>
+          <a:lstStyle/>
+          <a:p>
+            <a:r>
+              <a:rPr lang="en-US" b="1" dirty="0" smtClean="0">
+                <a:solidFill>
+                  <a:srgbClr val="C00000"/>
+                </a:solidFill>
+                <a:latin typeface="Times New Roman" pitchFamily="18" charset="0"/>
+                <a:cs typeface="Times New Roman" pitchFamily="18" charset="0"/>
+              </a:rPr>
+              <a:t>The Commands</a:t>
+            </a:r>
+            <a:endParaRPr lang="en-US" b="1" dirty="0">
+              <a:solidFill>
+                <a:srgbClr val="C00000"/>
+              </a:solidFill>
+              <a:latin typeface="Times New Roman" pitchFamily="18" charset="0"/>
+              <a:cs typeface="Times New Roman" pitchFamily="18" charset="0"/>
+            </a:endParaRPr>
+          </a:p>
+        </p:txBody>
+      </p:sp>
+      <p:pic>
+        <p:nvPicPr>
+          <p:cNvPr id="4" name="Picture 2" descr="C:\Users\nives\AllFolders\UnitnBookingBot\pictures\unitn_logo.png"/>
+          <p:cNvPicPr>
+            <a:picLocks noChangeAspect="1" noChangeArrowheads="1"/>
+          </p:cNvPicPr>
+          <p:nvPr/>
+        </p:nvPicPr>
+        <p:blipFill>
+          <a:blip r:embed="rId2">
+            <a:lum bright="70000" contrast="-70000"/>
+            <a:extLst>
+              <a:ext uri="{28A0092B-C50C-407E-A947-70E740481C1C}">
+                <a14:useLocalDpi xmlns:a14="http://schemas.microsoft.com/office/drawing/2010/main" val="0"/>
+              </a:ext>
+            </a:extLst>
+          </a:blip>
+          <a:srcRect/>
+          <a:stretch>
+            <a:fillRect/>
+          </a:stretch>
+        </p:blipFill>
+        <p:spPr bwMode="auto">
+          <a:xfrm>
+            <a:off x="0" y="0"/>
+            <a:ext cx="1728192" cy="1728192"/>
+          </a:xfrm>
+          <a:prstGeom prst="rect">
+            <a:avLst/>
+          </a:prstGeom>
+          <a:noFill/>
+          <a:extLst>
+            <a:ext uri="{909E8E84-426E-40DD-AFC4-6F175D3DCCD1}">
+              <a14:hiddenFill xmlns:a14="http://schemas.microsoft.com/office/drawing/2010/main">
+                <a:solidFill>
+                  <a:srgbClr val="FFFFFF"/>
+                </a:solidFill>
+              </a14:hiddenFill>
+            </a:ext>
+          </a:extLst>
+        </p:spPr>
+      </p:pic>
+      <p:sp>
+        <p:nvSpPr>
+          <p:cNvPr id="5" name="Segnaposto contenuto 2"/>
+          <p:cNvSpPr>
+            <a:spLocks noGrp="1"/>
+          </p:cNvSpPr>
+          <p:nvPr>
+            <p:ph idx="1"/>
+          </p:nvPr>
+        </p:nvSpPr>
+        <p:spPr>
+          <a:xfrm>
+            <a:off x="435471" y="1916833"/>
+            <a:ext cx="8229600" cy="648071"/>
+          </a:xfrm>
+        </p:spPr>
+        <p:txBody>
+          <a:bodyPr/>
+          <a:lstStyle/>
+          <a:p>
+            <a:pPr marL="0" indent="0">
+              <a:buNone/>
+            </a:pPr>
+            <a:r>
+              <a:rPr lang="en-US" i="1" dirty="0" smtClean="0">
+                <a:solidFill>
+                  <a:schemeClr val="tx2"/>
+                </a:solidFill>
+                <a:latin typeface="Times New Roman" pitchFamily="18" charset="0"/>
+                <a:cs typeface="Times New Roman" pitchFamily="18" charset="0"/>
+              </a:rPr>
+              <a:t>For general information:</a:t>
+            </a:r>
+            <a:endParaRPr lang="en-US" i="1" dirty="0">
+              <a:solidFill>
+                <a:schemeClr val="tx2"/>
+              </a:solidFill>
+              <a:latin typeface="Times New Roman" pitchFamily="18" charset="0"/>
+              <a:cs typeface="Times New Roman" pitchFamily="18" charset="0"/>
+            </a:endParaRPr>
+          </a:p>
+        </p:txBody>
+      </p:sp>
+      <p:sp>
+        <p:nvSpPr>
+          <p:cNvPr id="3" name="Rettangolo 2"/>
+          <p:cNvSpPr/>
+          <p:nvPr/>
+        </p:nvSpPr>
+        <p:spPr>
+          <a:xfrm>
+            <a:off x="454458" y="2607295"/>
+            <a:ext cx="1271502" cy="461665"/>
+          </a:xfrm>
+          <a:prstGeom prst="rect">
+            <a:avLst/>
+          </a:prstGeom>
+        </p:spPr>
+        <p:txBody>
+          <a:bodyPr wrap="none">
+            <a:spAutoFit/>
+          </a:bodyPr>
+          <a:lstStyle/>
+          <a:p>
+            <a:r>
+              <a:rPr lang="it-IT" sz="2400" dirty="0" smtClean="0">
+                <a:latin typeface="Cascadia Code SemiLight" pitchFamily="49" charset="0"/>
+                <a:cs typeface="Cascadia Code SemiLight" pitchFamily="49" charset="0"/>
+              </a:rPr>
+              <a:t>/</a:t>
+            </a:r>
+            <a:r>
+              <a:rPr lang="it-IT" sz="2400" dirty="0" err="1" smtClean="0">
+                <a:latin typeface="Cascadia Code SemiLight" pitchFamily="49" charset="0"/>
+                <a:cs typeface="Cascadia Code SemiLight" pitchFamily="49" charset="0"/>
+              </a:rPr>
+              <a:t>fairs</a:t>
+            </a:r>
+            <a:endParaRPr lang="it-IT" sz="2400" dirty="0">
+              <a:latin typeface="Cascadia Code SemiLight" pitchFamily="49" charset="0"/>
+              <a:cs typeface="Cascadia Code SemiLight" pitchFamily="49" charset="0"/>
+            </a:endParaRPr>
+          </a:p>
+        </p:txBody>
+      </p:sp>
+      <p:sp>
+        <p:nvSpPr>
+          <p:cNvPr id="7" name="Rettangolo 6"/>
+          <p:cNvSpPr/>
+          <p:nvPr/>
+        </p:nvSpPr>
+        <p:spPr>
+          <a:xfrm>
+            <a:off x="6563158" y="2607295"/>
+            <a:ext cx="1452642" cy="461665"/>
+          </a:xfrm>
+          <a:prstGeom prst="rect">
+            <a:avLst/>
+          </a:prstGeom>
+        </p:spPr>
+        <p:txBody>
+          <a:bodyPr wrap="none">
+            <a:spAutoFit/>
+          </a:bodyPr>
+          <a:lstStyle/>
+          <a:p>
+            <a:r>
+              <a:rPr lang="it-IT" sz="2400" dirty="0">
+                <a:latin typeface="Cascadia Code SemiLight" pitchFamily="49" charset="0"/>
+                <a:cs typeface="Cascadia Code SemiLight" pitchFamily="49" charset="0"/>
+              </a:rPr>
+              <a:t>/</a:t>
+            </a:r>
+            <a:r>
+              <a:rPr lang="it-IT" sz="2400" dirty="0" err="1">
+                <a:latin typeface="Cascadia Code SemiLight" pitchFamily="49" charset="0"/>
+                <a:cs typeface="Cascadia Code SemiLight" pitchFamily="49" charset="0"/>
+              </a:rPr>
+              <a:t>whoami</a:t>
+            </a:r>
+            <a:endParaRPr lang="it-IT" sz="2400" dirty="0">
+              <a:latin typeface="Cascadia Code SemiLight" pitchFamily="49" charset="0"/>
+              <a:cs typeface="Cascadia Code SemiLight" pitchFamily="49" charset="0"/>
+            </a:endParaRPr>
+          </a:p>
+        </p:txBody>
+      </p:sp>
+      <p:sp>
+        <p:nvSpPr>
+          <p:cNvPr id="8" name="Rettangolo 7"/>
+          <p:cNvSpPr/>
+          <p:nvPr/>
+        </p:nvSpPr>
+        <p:spPr>
+          <a:xfrm>
+            <a:off x="3509806" y="2607295"/>
+            <a:ext cx="1452642" cy="461665"/>
+          </a:xfrm>
+          <a:prstGeom prst="rect">
+            <a:avLst/>
+          </a:prstGeom>
+        </p:spPr>
+        <p:txBody>
+          <a:bodyPr wrap="none">
+            <a:spAutoFit/>
+          </a:bodyPr>
+          <a:lstStyle/>
+          <a:p>
+            <a:r>
+              <a:rPr lang="it-IT" sz="2400" dirty="0">
+                <a:latin typeface="Cascadia Code SemiLight" pitchFamily="49" charset="0"/>
+                <a:cs typeface="Cascadia Code SemiLight" pitchFamily="49" charset="0"/>
+              </a:rPr>
+              <a:t>/</a:t>
+            </a:r>
+            <a:r>
+              <a:rPr lang="it-IT" sz="2400" dirty="0" err="1">
+                <a:latin typeface="Cascadia Code SemiLight" pitchFamily="49" charset="0"/>
+                <a:cs typeface="Cascadia Code SemiLight" pitchFamily="49" charset="0"/>
+              </a:rPr>
+              <a:t>events</a:t>
+            </a:r>
+            <a:endParaRPr lang="it-IT" sz="2400" dirty="0">
+              <a:latin typeface="Cascadia Code SemiLight" pitchFamily="49" charset="0"/>
+              <a:cs typeface="Cascadia Code SemiLight" pitchFamily="49" charset="0"/>
+            </a:endParaRPr>
+          </a:p>
+        </p:txBody>
+      </p:sp>
+      <p:sp>
+        <p:nvSpPr>
+          <p:cNvPr id="9" name="Rettangolo 8"/>
+          <p:cNvSpPr/>
+          <p:nvPr/>
+        </p:nvSpPr>
+        <p:spPr>
+          <a:xfrm>
+            <a:off x="454458" y="3933056"/>
+            <a:ext cx="1090363" cy="461665"/>
+          </a:xfrm>
+          <a:prstGeom prst="rect">
+            <a:avLst/>
+          </a:prstGeom>
+        </p:spPr>
+        <p:txBody>
+          <a:bodyPr wrap="none">
+            <a:spAutoFit/>
+          </a:bodyPr>
+          <a:lstStyle/>
+          <a:p>
+            <a:r>
+              <a:rPr lang="it-IT" sz="2400" dirty="0">
+                <a:latin typeface="Cascadia Code SemiLight" pitchFamily="49" charset="0"/>
+                <a:cs typeface="Cascadia Code SemiLight" pitchFamily="49" charset="0"/>
+              </a:rPr>
+              <a:t>/book</a:t>
+            </a:r>
+          </a:p>
+        </p:txBody>
+      </p:sp>
+      <p:sp>
+        <p:nvSpPr>
+          <p:cNvPr id="10" name="Rettangolo 9"/>
+          <p:cNvSpPr/>
+          <p:nvPr/>
+        </p:nvSpPr>
+        <p:spPr>
+          <a:xfrm>
+            <a:off x="6563158" y="3933054"/>
+            <a:ext cx="2177199" cy="461665"/>
+          </a:xfrm>
+          <a:prstGeom prst="rect">
+            <a:avLst/>
+          </a:prstGeom>
+        </p:spPr>
+        <p:txBody>
+          <a:bodyPr wrap="none">
+            <a:spAutoFit/>
+          </a:bodyPr>
+          <a:lstStyle/>
+          <a:p>
+            <a:r>
+              <a:rPr lang="it-IT" sz="2400" dirty="0">
+                <a:latin typeface="Cascadia Code SemiLight" pitchFamily="49" charset="0"/>
+                <a:cs typeface="Cascadia Code SemiLight" pitchFamily="49" charset="0"/>
+              </a:rPr>
+              <a:t>/</a:t>
+            </a:r>
+            <a:r>
+              <a:rPr lang="it-IT" sz="2400" dirty="0" err="1">
+                <a:latin typeface="Cascadia Code SemiLight" pitchFamily="49" charset="0"/>
+                <a:cs typeface="Cascadia Code SemiLight" pitchFamily="49" charset="0"/>
+              </a:rPr>
+              <a:t>mybookings</a:t>
+            </a:r>
+            <a:endParaRPr lang="it-IT" sz="2400" dirty="0">
+              <a:latin typeface="Cascadia Code SemiLight" pitchFamily="49" charset="0"/>
+              <a:cs typeface="Cascadia Code SemiLight" pitchFamily="49" charset="0"/>
+            </a:endParaRPr>
+          </a:p>
+        </p:txBody>
+      </p:sp>
+      <p:sp>
+        <p:nvSpPr>
+          <p:cNvPr id="11" name="Rettangolo 10"/>
+          <p:cNvSpPr/>
+          <p:nvPr/>
+        </p:nvSpPr>
+        <p:spPr>
+          <a:xfrm>
+            <a:off x="3509806" y="3933055"/>
+            <a:ext cx="1452642" cy="461665"/>
+          </a:xfrm>
+          <a:prstGeom prst="rect">
+            <a:avLst/>
+          </a:prstGeom>
+        </p:spPr>
+        <p:txBody>
+          <a:bodyPr wrap="none">
+            <a:spAutoFit/>
+          </a:bodyPr>
+          <a:lstStyle/>
+          <a:p>
+            <a:r>
+              <a:rPr lang="it-IT" sz="2400" dirty="0">
+                <a:latin typeface="Cascadia Code SemiLight" pitchFamily="49" charset="0"/>
+                <a:cs typeface="Cascadia Code SemiLight" pitchFamily="49" charset="0"/>
+              </a:rPr>
+              <a:t>/</a:t>
+            </a:r>
+            <a:r>
+              <a:rPr lang="it-IT" sz="2400" dirty="0" err="1">
+                <a:latin typeface="Cascadia Code SemiLight" pitchFamily="49" charset="0"/>
+                <a:cs typeface="Cascadia Code SemiLight" pitchFamily="49" charset="0"/>
+              </a:rPr>
+              <a:t>unbook</a:t>
+            </a:r>
+            <a:endParaRPr lang="it-IT" sz="2400" dirty="0">
+              <a:latin typeface="Cascadia Code SemiLight" pitchFamily="49" charset="0"/>
+              <a:cs typeface="Cascadia Code SemiLight" pitchFamily="49" charset="0"/>
+            </a:endParaRPr>
+          </a:p>
+        </p:txBody>
+      </p:sp>
+      <p:sp>
+        <p:nvSpPr>
+          <p:cNvPr id="12" name="Rettangolo 11"/>
+          <p:cNvSpPr/>
+          <p:nvPr/>
+        </p:nvSpPr>
+        <p:spPr>
+          <a:xfrm>
+            <a:off x="454458" y="5301208"/>
+            <a:ext cx="1633781" cy="461665"/>
+          </a:xfrm>
+          <a:prstGeom prst="rect">
+            <a:avLst/>
+          </a:prstGeom>
+        </p:spPr>
+        <p:txBody>
+          <a:bodyPr wrap="none">
+            <a:spAutoFit/>
+          </a:bodyPr>
+          <a:lstStyle/>
+          <a:p>
+            <a:r>
+              <a:rPr lang="it-IT" sz="2400" dirty="0">
+                <a:latin typeface="Cascadia Code SemiLight" pitchFamily="49" charset="0"/>
+                <a:cs typeface="Cascadia Code SemiLight" pitchFamily="49" charset="0"/>
+              </a:rPr>
+              <a:t>/</a:t>
+            </a:r>
+            <a:r>
+              <a:rPr lang="it-IT" sz="2400" dirty="0" err="1">
+                <a:latin typeface="Cascadia Code SemiLight" pitchFamily="49" charset="0"/>
+                <a:cs typeface="Cascadia Code SemiLight" pitchFamily="49" charset="0"/>
+              </a:rPr>
+              <a:t>publish</a:t>
+            </a:r>
+            <a:endParaRPr lang="it-IT" sz="2400" dirty="0">
+              <a:latin typeface="Cascadia Code SemiLight" pitchFamily="49" charset="0"/>
+              <a:cs typeface="Cascadia Code SemiLight" pitchFamily="49" charset="0"/>
+            </a:endParaRPr>
+          </a:p>
+        </p:txBody>
+      </p:sp>
+      <p:sp>
+        <p:nvSpPr>
+          <p:cNvPr id="13" name="Rettangolo 12"/>
+          <p:cNvSpPr/>
+          <p:nvPr/>
+        </p:nvSpPr>
+        <p:spPr>
+          <a:xfrm>
+            <a:off x="6563158" y="5301208"/>
+            <a:ext cx="1633781" cy="461665"/>
+          </a:xfrm>
+          <a:prstGeom prst="rect">
+            <a:avLst/>
+          </a:prstGeom>
+        </p:spPr>
+        <p:txBody>
+          <a:bodyPr wrap="none">
+            <a:spAutoFit/>
+          </a:bodyPr>
+          <a:lstStyle/>
+          <a:p>
+            <a:r>
+              <a:rPr lang="it-IT" sz="2400" dirty="0">
+                <a:latin typeface="Cascadia Code SemiLight" pitchFamily="49" charset="0"/>
+                <a:cs typeface="Cascadia Code SemiLight" pitchFamily="49" charset="0"/>
+              </a:rPr>
+              <a:t>/</a:t>
+            </a:r>
+            <a:r>
+              <a:rPr lang="it-IT" sz="2400" dirty="0" err="1">
+                <a:latin typeface="Cascadia Code SemiLight" pitchFamily="49" charset="0"/>
+                <a:cs typeface="Cascadia Code SemiLight" pitchFamily="49" charset="0"/>
+              </a:rPr>
+              <a:t>newslot</a:t>
+            </a:r>
+            <a:endParaRPr lang="it-IT" sz="2400" dirty="0">
+              <a:latin typeface="Cascadia Code SemiLight" pitchFamily="49" charset="0"/>
+              <a:cs typeface="Cascadia Code SemiLight" pitchFamily="49" charset="0"/>
+            </a:endParaRPr>
+          </a:p>
+        </p:txBody>
+      </p:sp>
+      <p:sp>
+        <p:nvSpPr>
+          <p:cNvPr id="14" name="Rettangolo 13"/>
+          <p:cNvSpPr/>
+          <p:nvPr/>
+        </p:nvSpPr>
+        <p:spPr>
+          <a:xfrm>
+            <a:off x="3509806" y="5301207"/>
+            <a:ext cx="1996059" cy="461665"/>
+          </a:xfrm>
+          <a:prstGeom prst="rect">
+            <a:avLst/>
+          </a:prstGeom>
+        </p:spPr>
+        <p:txBody>
+          <a:bodyPr wrap="none">
+            <a:spAutoFit/>
+          </a:bodyPr>
+          <a:lstStyle/>
+          <a:p>
+            <a:r>
+              <a:rPr lang="it-IT" sz="2400" dirty="0">
+                <a:latin typeface="Cascadia Code SemiLight" pitchFamily="49" charset="0"/>
+                <a:cs typeface="Cascadia Code SemiLight" pitchFamily="49" charset="0"/>
+              </a:rPr>
+              <a:t>/</a:t>
+            </a:r>
+            <a:r>
+              <a:rPr lang="it-IT" sz="2400" dirty="0" err="1">
+                <a:latin typeface="Cascadia Code SemiLight" pitchFamily="49" charset="0"/>
+                <a:cs typeface="Cascadia Code SemiLight" pitchFamily="49" charset="0"/>
+              </a:rPr>
+              <a:t>changedes</a:t>
+            </a:r>
+            <a:endParaRPr lang="it-IT" sz="2400" dirty="0">
+              <a:latin typeface="Cascadia Code SemiLight" pitchFamily="49" charset="0"/>
+              <a:cs typeface="Cascadia Code SemiLight" pitchFamily="49" charset="0"/>
+            </a:endParaRPr>
+          </a:p>
+        </p:txBody>
+      </p:sp>
+      <p:sp>
+        <p:nvSpPr>
+          <p:cNvPr id="15" name="Rettangolo 14"/>
+          <p:cNvSpPr/>
+          <p:nvPr/>
+        </p:nvSpPr>
+        <p:spPr>
+          <a:xfrm>
+            <a:off x="454458" y="5892427"/>
+            <a:ext cx="2177199" cy="461665"/>
+          </a:xfrm>
+          <a:prstGeom prst="rect">
+            <a:avLst/>
+          </a:prstGeom>
+        </p:spPr>
+        <p:txBody>
+          <a:bodyPr wrap="none">
+            <a:spAutoFit/>
+          </a:bodyPr>
+          <a:lstStyle/>
+          <a:p>
+            <a:r>
+              <a:rPr lang="it-IT" sz="2400" dirty="0">
+                <a:latin typeface="Cascadia Code SemiLight" pitchFamily="49" charset="0"/>
+                <a:cs typeface="Cascadia Code SemiLight" pitchFamily="49" charset="0"/>
+              </a:rPr>
+              <a:t>/</a:t>
+            </a:r>
+            <a:r>
+              <a:rPr lang="it-IT" sz="2400" dirty="0" err="1">
+                <a:latin typeface="Cascadia Code SemiLight" pitchFamily="49" charset="0"/>
+                <a:cs typeface="Cascadia Code SemiLight" pitchFamily="49" charset="0"/>
+              </a:rPr>
+              <a:t>deleteslot</a:t>
+            </a:r>
+            <a:endParaRPr lang="it-IT" sz="2400" dirty="0">
+              <a:latin typeface="Cascadia Code SemiLight" pitchFamily="49" charset="0"/>
+              <a:cs typeface="Cascadia Code SemiLight" pitchFamily="49" charset="0"/>
+            </a:endParaRPr>
+          </a:p>
+        </p:txBody>
+      </p:sp>
+      <p:sp>
+        <p:nvSpPr>
+          <p:cNvPr id="16" name="Rettangolo 15"/>
+          <p:cNvSpPr/>
+          <p:nvPr/>
+        </p:nvSpPr>
+        <p:spPr>
+          <a:xfrm>
+            <a:off x="6563158" y="5895527"/>
+            <a:ext cx="1814920" cy="461665"/>
+          </a:xfrm>
+          <a:prstGeom prst="rect">
+            <a:avLst/>
+          </a:prstGeom>
+        </p:spPr>
+        <p:txBody>
+          <a:bodyPr wrap="none">
+            <a:spAutoFit/>
+          </a:bodyPr>
+          <a:lstStyle/>
+          <a:p>
+            <a:r>
+              <a:rPr lang="it-IT" sz="2400" dirty="0">
+                <a:latin typeface="Cascadia Code SemiLight" pitchFamily="49" charset="0"/>
+                <a:cs typeface="Cascadia Code SemiLight" pitchFamily="49" charset="0"/>
+              </a:rPr>
+              <a:t>/</a:t>
+            </a:r>
+            <a:r>
+              <a:rPr lang="it-IT" sz="2400" dirty="0" err="1">
+                <a:latin typeface="Cascadia Code SemiLight" pitchFamily="49" charset="0"/>
+                <a:cs typeface="Cascadia Code SemiLight" pitchFamily="49" charset="0"/>
+              </a:rPr>
+              <a:t>myevents</a:t>
+            </a:r>
+            <a:endParaRPr lang="it-IT" sz="2400" dirty="0">
+              <a:latin typeface="Cascadia Code SemiLight" pitchFamily="49" charset="0"/>
+              <a:cs typeface="Cascadia Code SemiLight" pitchFamily="49" charset="0"/>
+            </a:endParaRPr>
+          </a:p>
+        </p:txBody>
+      </p:sp>
+      <p:sp>
+        <p:nvSpPr>
+          <p:cNvPr id="17" name="Rettangolo 16"/>
+          <p:cNvSpPr/>
+          <p:nvPr/>
+        </p:nvSpPr>
+        <p:spPr>
+          <a:xfrm>
+            <a:off x="3509806" y="5895527"/>
+            <a:ext cx="2358338" cy="461665"/>
+          </a:xfrm>
+          <a:prstGeom prst="rect">
+            <a:avLst/>
+          </a:prstGeom>
+        </p:spPr>
+        <p:txBody>
+          <a:bodyPr wrap="none">
+            <a:spAutoFit/>
+          </a:bodyPr>
+          <a:lstStyle/>
+          <a:p>
+            <a:r>
+              <a:rPr lang="it-IT" sz="2400" dirty="0">
+                <a:latin typeface="Cascadia Code SemiLight" pitchFamily="49" charset="0"/>
+                <a:cs typeface="Cascadia Code SemiLight" pitchFamily="49" charset="0"/>
+              </a:rPr>
+              <a:t>/</a:t>
+            </a:r>
+            <a:r>
+              <a:rPr lang="it-IT" sz="2400" dirty="0" err="1">
+                <a:latin typeface="Cascadia Code SemiLight" pitchFamily="49" charset="0"/>
+                <a:cs typeface="Cascadia Code SemiLight" pitchFamily="49" charset="0"/>
+              </a:rPr>
+              <a:t>deleteevent</a:t>
+            </a:r>
+            <a:endParaRPr lang="it-IT" sz="2400" dirty="0">
+              <a:latin typeface="Cascadia Code SemiLight" pitchFamily="49" charset="0"/>
+              <a:cs typeface="Cascadia Code SemiLight" pitchFamily="49" charset="0"/>
+            </a:endParaRPr>
+          </a:p>
+        </p:txBody>
+      </p:sp>
+      <p:sp>
+        <p:nvSpPr>
+          <p:cNvPr id="18" name="Segnaposto contenuto 2"/>
+          <p:cNvSpPr txBox="1">
+            <a:spLocks/>
+          </p:cNvSpPr>
+          <p:nvPr/>
+        </p:nvSpPr>
+        <p:spPr>
+          <a:xfrm>
+            <a:off x="454458" y="3215609"/>
+            <a:ext cx="8229600" cy="648071"/>
+          </a:xfrm>
+          <a:prstGeom prst="rect">
+            <a:avLst/>
+          </a:prstGeom>
+        </p:spPr>
+        <p:txBody>
+          <a:bodyPr vert="horz" lIns="91440" tIns="45720" rIns="91440" bIns="45720" rtlCol="0">
+            <a:normAutofit/>
+          </a:bodyPr>
+          <a:lstStyle>
+            <a:lvl1pPr marL="342900" indent="-342900" algn="l" defTabSz="914400" rtl="0" eaLnBrk="1" latinLnBrk="0" hangingPunct="1">
+              <a:spcBef>
+                <a:spcPct val="20000"/>
+              </a:spcBef>
+              <a:buFont typeface="Arial" pitchFamily="34" charset="0"/>
+              <a:buChar char="•"/>
+              <a:defRPr sz="3200" kern="1200">
+                <a:solidFill>
+                  <a:schemeClr val="tx1"/>
+                </a:solidFill>
+                <a:latin typeface="+mn-lt"/>
+                <a:ea typeface="+mn-ea"/>
+                <a:cs typeface="+mn-cs"/>
+              </a:defRPr>
+            </a:lvl1pPr>
+            <a:lvl2pPr marL="742950" indent="-285750" algn="l" defTabSz="914400" rtl="0" eaLnBrk="1" latinLnBrk="0" hangingPunct="1">
+              <a:spcBef>
+                <a:spcPct val="20000"/>
+              </a:spcBef>
+              <a:buFont typeface="Arial" pitchFamily="34" charset="0"/>
+              <a:buChar char="–"/>
+              <a:defRPr sz="2800" kern="1200">
+                <a:solidFill>
+                  <a:schemeClr val="tx1"/>
+                </a:solidFill>
+                <a:latin typeface="+mn-lt"/>
+                <a:ea typeface="+mn-ea"/>
+                <a:cs typeface="+mn-cs"/>
+              </a:defRPr>
+            </a:lvl2pPr>
+            <a:lvl3pPr marL="1143000" indent="-228600" algn="l" defTabSz="914400" rtl="0" eaLnBrk="1" latinLnBrk="0" hangingPunct="1">
+              <a:spcBef>
+                <a:spcPct val="20000"/>
+              </a:spcBef>
+              <a:buFont typeface="Arial" pitchFamily="34" charset="0"/>
+              <a:buChar char="•"/>
+              <a:defRPr sz="2400" kern="1200">
+                <a:solidFill>
+                  <a:schemeClr val="tx1"/>
+                </a:solidFill>
+                <a:latin typeface="+mn-lt"/>
+                <a:ea typeface="+mn-ea"/>
+                <a:cs typeface="+mn-cs"/>
+              </a:defRPr>
+            </a:lvl3pPr>
+            <a:lvl4pPr marL="1600200" indent="-228600" algn="l" defTabSz="914400" rtl="0" eaLnBrk="1" latinLnBrk="0" hangingPunct="1">
+              <a:spcBef>
+                <a:spcPct val="20000"/>
+              </a:spcBef>
+              <a:buFont typeface="Arial" pitchFamily="34" charset="0"/>
+              <a:buChar char="–"/>
+              <a:defRPr sz="2000" kern="1200">
+                <a:solidFill>
+                  <a:schemeClr val="tx1"/>
+                </a:solidFill>
+                <a:latin typeface="+mn-lt"/>
+                <a:ea typeface="+mn-ea"/>
+                <a:cs typeface="+mn-cs"/>
+              </a:defRPr>
+            </a:lvl4pPr>
+            <a:lvl5pPr marL="2057400" indent="-228600" algn="l" defTabSz="914400" rtl="0" eaLnBrk="1" latinLnBrk="0" hangingPunct="1">
+              <a:spcBef>
+                <a:spcPct val="20000"/>
+              </a:spcBef>
+              <a:buFont typeface="Arial" pitchFamily="34" charset="0"/>
+              <a:buChar char="»"/>
+              <a:defRPr sz="2000" kern="1200">
+                <a:solidFill>
+                  <a:schemeClr val="tx1"/>
+                </a:solidFill>
+                <a:latin typeface="+mn-lt"/>
+                <a:ea typeface="+mn-ea"/>
+                <a:cs typeface="+mn-cs"/>
+              </a:defRPr>
+            </a:lvl5pPr>
+            <a:lvl6pPr marL="2514600" indent="-228600" algn="l" defTabSz="914400" rtl="0" eaLnBrk="1" latinLnBrk="0" hangingPunct="1">
+              <a:spcBef>
+                <a:spcPct val="20000"/>
+              </a:spcBef>
+              <a:buFont typeface="Arial" pitchFamily="34" charset="0"/>
+              <a:buChar char="•"/>
+              <a:defRPr sz="2000" kern="1200">
+                <a:solidFill>
+                  <a:schemeClr val="tx1"/>
+                </a:solidFill>
+                <a:latin typeface="+mn-lt"/>
+                <a:ea typeface="+mn-ea"/>
+                <a:cs typeface="+mn-cs"/>
+              </a:defRPr>
+            </a:lvl6pPr>
+            <a:lvl7pPr marL="2971800" indent="-228600" algn="l" defTabSz="914400" rtl="0" eaLnBrk="1" latinLnBrk="0" hangingPunct="1">
+              <a:spcBef>
+                <a:spcPct val="20000"/>
+              </a:spcBef>
+              <a:buFont typeface="Arial" pitchFamily="34" charset="0"/>
+              <a:buChar char="•"/>
+              <a:defRPr sz="2000" kern="1200">
+                <a:solidFill>
+                  <a:schemeClr val="tx1"/>
+                </a:solidFill>
+                <a:latin typeface="+mn-lt"/>
+                <a:ea typeface="+mn-ea"/>
+                <a:cs typeface="+mn-cs"/>
+              </a:defRPr>
+            </a:lvl7pPr>
+            <a:lvl8pPr marL="3429000" indent="-228600" algn="l" defTabSz="914400" rtl="0" eaLnBrk="1" latinLnBrk="0" hangingPunct="1">
+              <a:spcBef>
+                <a:spcPct val="20000"/>
+              </a:spcBef>
+              <a:buFont typeface="Arial" pitchFamily="34" charset="0"/>
+              <a:buChar char="•"/>
+              <a:defRPr sz="2000" kern="1200">
+                <a:solidFill>
+                  <a:schemeClr val="tx1"/>
+                </a:solidFill>
+                <a:latin typeface="+mn-lt"/>
+                <a:ea typeface="+mn-ea"/>
+                <a:cs typeface="+mn-cs"/>
+              </a:defRPr>
+            </a:lvl8pPr>
+            <a:lvl9pPr marL="3886200" indent="-228600" algn="l" defTabSz="914400" rtl="0" eaLnBrk="1" latinLnBrk="0" hangingPunct="1">
+              <a:spcBef>
+                <a:spcPct val="20000"/>
+              </a:spcBef>
+              <a:buFont typeface="Arial" pitchFamily="34" charset="0"/>
+              <a:buChar char="•"/>
+              <a:defRPr sz="2000" kern="1200">
+                <a:solidFill>
+                  <a:schemeClr val="tx1"/>
+                </a:solidFill>
+                <a:latin typeface="+mn-lt"/>
+                <a:ea typeface="+mn-ea"/>
+                <a:cs typeface="+mn-cs"/>
+              </a:defRPr>
+            </a:lvl9pPr>
+          </a:lstStyle>
+          <a:p>
+            <a:pPr marL="0" indent="0">
+              <a:buFont typeface="Arial" pitchFamily="34" charset="0"/>
+              <a:buNone/>
+            </a:pPr>
+            <a:r>
+              <a:rPr lang="en-US" i="1" dirty="0" smtClean="0">
+                <a:solidFill>
+                  <a:schemeClr val="tx2"/>
+                </a:solidFill>
+                <a:latin typeface="Times New Roman" pitchFamily="18" charset="0"/>
+                <a:cs typeface="Times New Roman" pitchFamily="18" charset="0"/>
+              </a:rPr>
+              <a:t>For event attenders:</a:t>
+            </a:r>
+            <a:endParaRPr lang="en-US" i="1" dirty="0">
+              <a:solidFill>
+                <a:schemeClr val="tx2"/>
+              </a:solidFill>
+              <a:latin typeface="Times New Roman" pitchFamily="18" charset="0"/>
+              <a:cs typeface="Times New Roman" pitchFamily="18" charset="0"/>
+            </a:endParaRPr>
+          </a:p>
+        </p:txBody>
+      </p:sp>
+      <p:sp>
+        <p:nvSpPr>
+          <p:cNvPr id="19" name="Segnaposto contenuto 2"/>
+          <p:cNvSpPr txBox="1">
+            <a:spLocks/>
+          </p:cNvSpPr>
+          <p:nvPr/>
+        </p:nvSpPr>
+        <p:spPr>
+          <a:xfrm>
+            <a:off x="454458" y="4562258"/>
+            <a:ext cx="8229600" cy="648071"/>
+          </a:xfrm>
+          <a:prstGeom prst="rect">
+            <a:avLst/>
+          </a:prstGeom>
+        </p:spPr>
+        <p:txBody>
+          <a:bodyPr vert="horz" lIns="91440" tIns="45720" rIns="91440" bIns="45720" rtlCol="0">
+            <a:normAutofit/>
+          </a:bodyPr>
+          <a:lstStyle>
+            <a:lvl1pPr marL="342900" indent="-342900" algn="l" defTabSz="914400" rtl="0" eaLnBrk="1" latinLnBrk="0" hangingPunct="1">
+              <a:spcBef>
+                <a:spcPct val="20000"/>
+              </a:spcBef>
+              <a:buFont typeface="Arial" pitchFamily="34" charset="0"/>
+              <a:buChar char="•"/>
+              <a:defRPr sz="3200" kern="1200">
+                <a:solidFill>
+                  <a:schemeClr val="tx1"/>
+                </a:solidFill>
+                <a:latin typeface="+mn-lt"/>
+                <a:ea typeface="+mn-ea"/>
+                <a:cs typeface="+mn-cs"/>
+              </a:defRPr>
+            </a:lvl1pPr>
+            <a:lvl2pPr marL="742950" indent="-285750" algn="l" defTabSz="914400" rtl="0" eaLnBrk="1" latinLnBrk="0" hangingPunct="1">
+              <a:spcBef>
+                <a:spcPct val="20000"/>
+              </a:spcBef>
+              <a:buFont typeface="Arial" pitchFamily="34" charset="0"/>
+              <a:buChar char="–"/>
+              <a:defRPr sz="2800" kern="1200">
+                <a:solidFill>
+                  <a:schemeClr val="tx1"/>
+                </a:solidFill>
+                <a:latin typeface="+mn-lt"/>
+                <a:ea typeface="+mn-ea"/>
+                <a:cs typeface="+mn-cs"/>
+              </a:defRPr>
+            </a:lvl2pPr>
+            <a:lvl3pPr marL="1143000" indent="-228600" algn="l" defTabSz="914400" rtl="0" eaLnBrk="1" latinLnBrk="0" hangingPunct="1">
+              <a:spcBef>
+                <a:spcPct val="20000"/>
+              </a:spcBef>
+              <a:buFont typeface="Arial" pitchFamily="34" charset="0"/>
+              <a:buChar char="•"/>
+              <a:defRPr sz="2400" kern="1200">
+                <a:solidFill>
+                  <a:schemeClr val="tx1"/>
+                </a:solidFill>
+                <a:latin typeface="+mn-lt"/>
+                <a:ea typeface="+mn-ea"/>
+                <a:cs typeface="+mn-cs"/>
+              </a:defRPr>
+            </a:lvl3pPr>
+            <a:lvl4pPr marL="1600200" indent="-228600" algn="l" defTabSz="914400" rtl="0" eaLnBrk="1" latinLnBrk="0" hangingPunct="1">
+              <a:spcBef>
+                <a:spcPct val="20000"/>
+              </a:spcBef>
+              <a:buFont typeface="Arial" pitchFamily="34" charset="0"/>
+              <a:buChar char="–"/>
+              <a:defRPr sz="2000" kern="1200">
+                <a:solidFill>
+                  <a:schemeClr val="tx1"/>
+                </a:solidFill>
+                <a:latin typeface="+mn-lt"/>
+                <a:ea typeface="+mn-ea"/>
+                <a:cs typeface="+mn-cs"/>
+              </a:defRPr>
+            </a:lvl4pPr>
+            <a:lvl5pPr marL="2057400" indent="-228600" algn="l" defTabSz="914400" rtl="0" eaLnBrk="1" latinLnBrk="0" hangingPunct="1">
+              <a:spcBef>
+                <a:spcPct val="20000"/>
+              </a:spcBef>
+              <a:buFont typeface="Arial" pitchFamily="34" charset="0"/>
+              <a:buChar char="»"/>
+              <a:defRPr sz="2000" kern="1200">
+                <a:solidFill>
+                  <a:schemeClr val="tx1"/>
+                </a:solidFill>
+                <a:latin typeface="+mn-lt"/>
+                <a:ea typeface="+mn-ea"/>
+                <a:cs typeface="+mn-cs"/>
+              </a:defRPr>
+            </a:lvl5pPr>
+            <a:lvl6pPr marL="2514600" indent="-228600" algn="l" defTabSz="914400" rtl="0" eaLnBrk="1" latinLnBrk="0" hangingPunct="1">
+              <a:spcBef>
+                <a:spcPct val="20000"/>
+              </a:spcBef>
+              <a:buFont typeface="Arial" pitchFamily="34" charset="0"/>
+              <a:buChar char="•"/>
+              <a:defRPr sz="2000" kern="1200">
+                <a:solidFill>
+                  <a:schemeClr val="tx1"/>
+                </a:solidFill>
+                <a:latin typeface="+mn-lt"/>
+                <a:ea typeface="+mn-ea"/>
+                <a:cs typeface="+mn-cs"/>
+              </a:defRPr>
+            </a:lvl6pPr>
+            <a:lvl7pPr marL="2971800" indent="-228600" algn="l" defTabSz="914400" rtl="0" eaLnBrk="1" latinLnBrk="0" hangingPunct="1">
+              <a:spcBef>
+                <a:spcPct val="20000"/>
+              </a:spcBef>
+              <a:buFont typeface="Arial" pitchFamily="34" charset="0"/>
+              <a:buChar char="•"/>
+              <a:defRPr sz="2000" kern="1200">
+                <a:solidFill>
+                  <a:schemeClr val="tx1"/>
+                </a:solidFill>
+                <a:latin typeface="+mn-lt"/>
+                <a:ea typeface="+mn-ea"/>
+                <a:cs typeface="+mn-cs"/>
+              </a:defRPr>
+            </a:lvl7pPr>
+            <a:lvl8pPr marL="3429000" indent="-228600" algn="l" defTabSz="914400" rtl="0" eaLnBrk="1" latinLnBrk="0" hangingPunct="1">
+              <a:spcBef>
+                <a:spcPct val="20000"/>
+              </a:spcBef>
+              <a:buFont typeface="Arial" pitchFamily="34" charset="0"/>
+              <a:buChar char="•"/>
+              <a:defRPr sz="2000" kern="1200">
+                <a:solidFill>
+                  <a:schemeClr val="tx1"/>
+                </a:solidFill>
+                <a:latin typeface="+mn-lt"/>
+                <a:ea typeface="+mn-ea"/>
+                <a:cs typeface="+mn-cs"/>
+              </a:defRPr>
+            </a:lvl8pPr>
+            <a:lvl9pPr marL="3886200" indent="-228600" algn="l" defTabSz="914400" rtl="0" eaLnBrk="1" latinLnBrk="0" hangingPunct="1">
+              <a:spcBef>
+                <a:spcPct val="20000"/>
+              </a:spcBef>
+              <a:buFont typeface="Arial" pitchFamily="34" charset="0"/>
+              <a:buChar char="•"/>
+              <a:defRPr sz="2000" kern="1200">
+                <a:solidFill>
+                  <a:schemeClr val="tx1"/>
+                </a:solidFill>
+                <a:latin typeface="+mn-lt"/>
+                <a:ea typeface="+mn-ea"/>
+                <a:cs typeface="+mn-cs"/>
+              </a:defRPr>
+            </a:lvl9pPr>
+          </a:lstStyle>
+          <a:p>
+            <a:pPr marL="0" indent="0">
+              <a:buFont typeface="Arial" pitchFamily="34" charset="0"/>
+              <a:buNone/>
+            </a:pPr>
+            <a:r>
+              <a:rPr lang="en-US" i="1" dirty="0" smtClean="0">
+                <a:solidFill>
+                  <a:schemeClr val="tx2"/>
+                </a:solidFill>
+                <a:latin typeface="Times New Roman" pitchFamily="18" charset="0"/>
+                <a:cs typeface="Times New Roman" pitchFamily="18" charset="0"/>
+              </a:rPr>
+              <a:t>For event organizers:</a:t>
+            </a:r>
+            <a:endParaRPr lang="en-US" i="1" dirty="0">
+              <a:solidFill>
+                <a:schemeClr val="tx2"/>
+              </a:solidFill>
+              <a:latin typeface="Times New Roman" pitchFamily="18" charset="0"/>
+              <a:cs typeface="Times New Roman" pitchFamily="18" charset="0"/>
+            </a:endParaRPr>
+          </a:p>
+        </p:txBody>
+      </p:sp>
+    </p:spTree>
+    <p:extLst>
+      <p:ext uri="{BB962C8B-B14F-4D97-AF65-F5344CB8AC3E}">
+        <p14:creationId xmlns:p14="http://schemas.microsoft.com/office/powerpoint/2010/main" val="1778354878"/>
+      </p:ext>
+    </p:extLst>
+  </p:cSld>
+  <p:clrMapOvr>
+    <a:masterClrMapping/>
+  </p:clrMapOvr>
+  <p:timing>
+    <p:tnLst>
+      <p:par>
+        <p:cTn id="1" dur="indefinite" restart="never" nodeType="tmRoot"/>
+      </p:par>
+    </p:tnLst>
+  </p:timing>
+</p:sld>
+</file>
+
+<file path=ppt/slides/slide9.xml><?xml version="1.0" encoding="utf-8"?>
+<p:sld xmlns:a="http://schemas.openxmlformats.org/drawingml/2006/main" xmlns:r="http://schemas.openxmlformats.org/officeDocument/2006/relationships" xmlns:p="http://schemas.openxmlformats.org/presentationml/2006/main">
+  <p:cSld>
+    <p:spTree>
+      <p:nvGrpSpPr>
+        <p:cNvPr id="1" name=""/>
+        <p:cNvGrpSpPr/>
+        <p:nvPr/>
+      </p:nvGrpSpPr>
+      <p:grpSpPr>
+        <a:xfrm>
+          <a:off x="0" y="0"/>
+          <a:ext cx="0" cy="0"/>
+          <a:chOff x="0" y="0"/>
+          <a:chExt cx="0" cy="0"/>
+        </a:xfrm>
+      </p:grpSpPr>
+      <p:pic>
+        <p:nvPicPr>
+          <p:cNvPr id="1026" name="Picture 2" descr="C:\Users\nives\AllFolders\UnitnBookingBot\pictures\unitn_logo.png"/>
+          <p:cNvPicPr>
+            <a:picLocks noChangeAspect="1" noChangeArrowheads="1"/>
+          </p:cNvPicPr>
+          <p:nvPr/>
+        </p:nvPicPr>
+        <p:blipFill>
+          <a:blip r:embed="rId2">
+            <a:lum bright="70000" contrast="-70000"/>
+            <a:extLst>
+              <a:ext uri="{28A0092B-C50C-407E-A947-70E740481C1C}">
+                <a14:useLocalDpi xmlns:a14="http://schemas.microsoft.com/office/drawing/2010/main" val="0"/>
+              </a:ext>
+            </a:extLst>
+          </a:blip>
+          <a:srcRect/>
+          <a:stretch>
+            <a:fillRect/>
+          </a:stretch>
+        </p:blipFill>
+        <p:spPr bwMode="auto">
+          <a:xfrm>
+            <a:off x="1187624" y="1419"/>
+            <a:ext cx="6858000" cy="6858000"/>
+          </a:xfrm>
+          <a:prstGeom prst="rect">
+            <a:avLst/>
+          </a:prstGeom>
+          <a:noFill/>
+          <a:extLst>
+            <a:ext uri="{909E8E84-426E-40DD-AFC4-6F175D3DCCD1}">
+              <a14:hiddenFill xmlns:a14="http://schemas.microsoft.com/office/drawing/2010/main">
+                <a:solidFill>
+                  <a:srgbClr val="FFFFFF"/>
+                </a:solidFill>
+              </a14:hiddenFill>
+            </a:ext>
+          </a:extLst>
+        </p:spPr>
+      </p:pic>
+      <p:sp>
+        <p:nvSpPr>
+          <p:cNvPr id="2" name="Titolo 1"/>
+          <p:cNvSpPr>
+            <a:spLocks noGrp="1"/>
+          </p:cNvSpPr>
+          <p:nvPr>
+            <p:ph type="ctrTitle"/>
+          </p:nvPr>
+        </p:nvSpPr>
+        <p:spPr>
+          <a:xfrm>
+            <a:off x="688032" y="2391023"/>
+            <a:ext cx="7772400" cy="1470025"/>
+          </a:xfrm>
+        </p:spPr>
+        <p:txBody>
+          <a:bodyPr/>
+          <a:lstStyle/>
+          <a:p>
+            <a:r>
+              <a:rPr lang="en-US" b="1" dirty="0" smtClean="0">
+                <a:solidFill>
+                  <a:srgbClr val="C00000"/>
+                </a:solidFill>
+                <a:latin typeface="Times New Roman" pitchFamily="18" charset="0"/>
+                <a:cs typeface="Times New Roman" pitchFamily="18" charset="0"/>
+              </a:rPr>
+              <a:t>The End</a:t>
+            </a:r>
+            <a:endParaRPr lang="en-US" b="1" dirty="0">
+              <a:solidFill>
+                <a:srgbClr val="C00000"/>
+              </a:solidFill>
+              <a:latin typeface="Times New Roman" pitchFamily="18" charset="0"/>
+              <a:cs typeface="Times New Roman" pitchFamily="18" charset="0"/>
+            </a:endParaRPr>
+          </a:p>
+        </p:txBody>
+      </p:sp>
+    </p:spTree>
+    <p:extLst>
+      <p:ext uri="{BB962C8B-B14F-4D97-AF65-F5344CB8AC3E}">
+        <p14:creationId xmlns:p14="http://schemas.microsoft.com/office/powerpoint/2010/main" val="2770197085"/>
+      </p:ext>
+    </p:extLst>
+  </p:cSld>
+  <p:clrMapOvr>
+    <a:masterClrMapping/>
+  </p:clrMapOvr>
+  <p:timing>
+    <p:tnLst>
+      <p:par>
+        <p:cTn id="1" dur="indefinite" restart="never" nodeType="tmRoot"/>
+      </p:par>
+    </p:tnLst>
+  </p:timing>
 </p:sld>
 </file>
 
